--- a/presentation/deck_latest.pptx
+++ b/presentation/deck_latest.pptx
@@ -724,7 +724,7 @@
           <a:lstStyle/>
           <a:p>
             <a:r>
-              <a:t>Одна команда воспроизводит все числа из чистой копии. Мы клонировали репозиторий на чистую машину: от клона до открытой карты и пересчитанных чисел — 7,5 минуты. В проекте 253 автотестов; отдельные тесты сверяют каждое число в документах и этой презентации с единым файлом итоговых чисел, где у каждого числа есть источник и протокол. Веса моделей лежат в репозитории, поэтому ничего не нужно обучать заново. Правила выбора моделей мы записывали до сравнения: например, модель поля берётся, только если она лучше медианы на отложенном рейсе. Это защищает от подгонки под тест. Файл итоговых чисел пересобирается одной командой после любого пересчёта, и документы с этой презентацией собираются из него скриптом. Если число в тексте разойдётся с файлом, тест упадёт. Поэтому то, что вы видите на слайдах, совпадает с тем, что считает код.</a:t>
+              <a:t>Одна команда воспроизводит все числа из чистой копии. Мы клонировали репозиторий на чистую машину: от клона до открытой карты и пересчитанных чисел — 7,5 минуты. В проекте 255 автотестов; отдельные тесты сверяют каждое число в документах и этой презентации с единым файлом итоговых чисел, где у каждого числа есть источник и протокол. Веса моделей лежат в репозитории, поэтому ничего не нужно обучать заново. Правила выбора моделей мы записывали до сравнения: например, модель поля берётся, только если она лучше медианы на отложенном рейсе. Это защищает от подгонки под тест. Файл итоговых чисел пересобирается одной командой после любого пересчёта, и документы с этой презентацией собираются из него скриптом. Если число в тексте разойдётся с файлом, тест упадёт. Поэтому то, что вы видите на слайдах, совпадает с тем, что считает код.</a:t>
             </a:r>
           </a:p>
         </p:txBody>
@@ -794,7 +794,7 @@
           <a:lstStyle/>
           <a:p>
             <a:r>
-              <a:t>Три числа, которые стоит запомнить. Детектор находит полосы мусора с F1 0.871 на отложенном тесте. Поле даёт 53.9 штуки на квадратный километр с честным интервалом. И 66 пар «снимок — поле» мы проверили и показали, почему штуки по снимку пока не измеряются. Спасибо, готовы к вопросам.</a:t>
+              <a:t>Три числа, которые стоит запомнить. Детектор находит полосы мусора с F1 0.871 на отложенном тесте. Поле даёт 53.9 штуки на квадратный километр с честным интервалом. И 66 пар «снимок — поле» мы проверили и показали, почему штуки по снимку пока не измеряются. Всего за эти дни мы проверили 71 гипотезу и эксперименты, и каждое решение записано до сравнения. Спасибо, готовы к вопросам.</a:t>
             </a:r>
           </a:p>
         </p:txBody>
@@ -934,7 +934,7 @@
           <a:lstStyle/>
           <a:p>
             <a:r>
-              <a:t>Спутник видит пиксель, а не предмет: прямого счёта штук по снимку не существует. Предмет в море — бутылка, пакет, обрывок сети — в сотни раз меньше пикселя Sentinel-2. В пикселе он занимает ничтожную долю, и спектр пикселя почти не меняется. Чтобы научить модель считать штуки, нужны пары: снимок и полевой счёт в то же время в том же месте. Мы прошли все 318 событий CSV организаторов: снимок рядом по времени есть у части, по метаданным остаётся 29, после масок облаков и блика — 12, а синхронных с учётом дрейфа — ноль. Отдельно мы нашли 66 пар по месту и времени в данных ADIS, но видимого сигнала мусора на снимке нет ни в одной. Это не недоработка поиска, а физика: спутник видит скопление, а не отдельный предмет. Поэтому решение устроено ступенями.</a:t>
+              <a:t>Спутник видит пиксель 10 м, а предмет — 2.5–50 см: прямого счёта штук по снимку не существует. Предмет в море — бутылка, пакет, обрывок сети — в сотни раз меньше пикселя Sentinel-2. В пикселе он занимает ничтожную долю, и спектр пикселя почти не меняется. Чтобы научить модель считать штуки, нужны пары: снимок и полевой счёт в то же время в том же месте. Мы прошли все 318 событий CSV организаторов: снимок рядом по времени есть у части, по метаданным остаётся 29, после масок облаков и блика — 12, а синхронных с учётом дрейфа — ноль. Отдельно мы нашли 66 пар по месту и времени в данных ADIS, но видимого сигнала мусора на снимке нет ни в одной. Это не недоработка поиска, а физика: спутник видит скопление, а не отдельный предмет. Поэтому решение устроено ступенями.</a:t>
             </a:r>
           </a:p>
         </p:txBody>
@@ -4746,8 +4746,8 @@
         </p:blipFill>
         <p:spPr>
           <a:xfrm>
-            <a:off x="5120640" y="2040254"/>
-            <a:ext cx="6400800" cy="3600450"/>
+            <a:off x="5120640" y="2041133"/>
+            <a:ext cx="6400800" cy="3598692"/>
           </a:xfrm>
           <a:prstGeom prst="rect">
             <a:avLst/>
@@ -5090,8 +5090,8 @@
         </p:blipFill>
         <p:spPr>
           <a:xfrm>
-            <a:off x="6824589" y="1737360"/>
-            <a:ext cx="2992901" cy="4206240"/>
+            <a:off x="5120640" y="2041133"/>
+            <a:ext cx="6400800" cy="3598692"/>
           </a:xfrm>
           <a:prstGeom prst="rect">
             <a:avLst/>
@@ -5374,7 +5374,7 @@
                 </a:solidFill>
                 <a:latin typeface="Segoe UI"/>
               </a:rPr>
-              <a:t>253</a:t>
+              <a:t>255</a:t>
             </a:r>
           </a:p>
         </p:txBody>
@@ -5826,7 +5826,7 @@
                 </a:solidFill>
                 <a:latin typeface="Segoe UI"/>
               </a:rPr>
-              <a:t>66</a:t>
+              <a:t>71</a:t>
             </a:r>
           </a:p>
         </p:txBody>
@@ -5865,7 +5865,7 @@
                 </a:solidFill>
                 <a:latin typeface="Segoe UI"/>
               </a:rPr>
-              <a:t>пар «снимок — поле» проверено</a:t>
+              <a:t>проверенных гипотез и экспериментов</a:t>
             </a:r>
           </a:p>
         </p:txBody>
@@ -6136,7 +6136,7 @@
                 </a:solidFill>
                 <a:latin typeface="Segoe UI"/>
               </a:rPr>
-              <a:t>Спутник видит пиксель, а не предмет: прямого счёта штук по снимку не существует</a:t>
+              <a:t>Спутник видит пиксель 10 м, а предмет — 2.5–50 см: прямого счёта штук по снимку не существует</a:t>
             </a:r>
           </a:p>
         </p:txBody>
@@ -6292,7 +6292,7 @@
                 </a:solidFill>
                 <a:latin typeface="Segoe UI"/>
               </a:rPr>
-              <a:t>предметов считаемы поштучно при пикселе 10 м</a:t>
+              <a:t>предметов считаемы поштучно при пикселе 10 м</a:t>
             </a:r>
           </a:p>
         </p:txBody>
@@ -7924,8 +7924,8 @@
         </p:blipFill>
         <p:spPr>
           <a:xfrm>
-            <a:off x="6617512" y="1737360"/>
-            <a:ext cx="3407054" cy="4206240"/>
+            <a:off x="6114343" y="1737360"/>
+            <a:ext cx="4413392" cy="4206240"/>
           </a:xfrm>
           <a:prstGeom prst="rect">
             <a:avLst/>
@@ -9209,7 +9209,7 @@
                 </a:solidFill>
                 <a:latin typeface="Segoe UI"/>
               </a:rPr>
-              <a:t>Искусственные мишени PLP: детектор видит пиксель только при большом покрытии</a:t>
+              <a:t>Искусственные мишени: 19 дат со счётом — детектор видит пиксель только при большом покрытии</a:t>
             </a:r>
           </a:p>
         </p:txBody>

--- a/presentation/deck_latest.pptx
+++ b/presentation/deck_latest.pptx
@@ -1214,7 +1214,7 @@
           <a:lstStyle/>
           <a:p>
             <a:r>
-              <a:t>Мы отличаем мусор от судов, пены, бликов, облаков и берега. На этом слайде примеры с отложенного теста: слева полоса, найденная верно; дальше пропуск, когда полоса слишком тонкая; судно с кильватером, которое спектрально похоже на мусор; пена и саргассум. Всего на тесте 75 ложных пикселей, и 64 процентов из них — суда и природная органика. Поэтому после детектора стоят фильтры: маска судов и кильватера, маска пены, блика и облаков по SCL, ветер по ERA5. Если снимок закрыт облаками или на нём блик, зона получает статус «анализ невозможен», а не «чисто». Это важно для эколога: отсутствие находки на плохом снимке ничего не говорит о воде. Для каждой причины ошибки у нас есть отдельный признак, который эколог видит в карточке: что исключено и что не проверяется. Например, водоросли и мутные речные шлейфы детектор не отличает надёжно, и мы пишем об этом прямо.</a:t>
+              <a:t>Мы отличаем мусор от судов, пены, бликов, облаков и берега. На этом слайде пять примеров прямо из сервиса, раздел «Проверка качества»: полоса, найденная верно; пропуск, когда детектор отметил только малую часть нити; судно с кильватером, которое спектрально похоже на мусор; пена, которую поймал фильтр; и снимок, где анализ невозможен из-за низкого солнца. Всего на тесте 75 ложных пикселей, и 64 процентов из них — суда и природная органика. Поэтому после детектора стоят фильтры: маска судов и кильватера, маска пены, блика и облаков по SCL, ветер по ERA5. Если снимок закрыт облаками или на нём блик, зона получает статус «анализ невозможен», а не «чисто». Это важно для эколога: отсутствие находки на плохом снимке ничего не говорит о воде. Для каждой причины ошибки у нас есть отдельный признак, который эколог видит в карточке: что исключено и что не проверяется. Например, водоросли и мутные речные шлейфы детектор не отличает надёжно, и мы пишем об этом прямо.</a:t>
             </a:r>
           </a:p>
         </p:txBody>
@@ -8112,9 +8112,165 @@
           </a:p>
         </p:txBody>
       </p:sp>
+      <p:sp>
+        <p:nvSpPr>
+          <p:cNvPr id="3" name="TextBox 2"/>
+          <p:cNvSpPr txBox="1"/>
+          <p:nvPr/>
+        </p:nvSpPr>
+        <p:spPr>
+          <a:xfrm>
+            <a:off x="649224" y="1737360"/>
+            <a:ext cx="4206240" cy="952500"/>
+          </a:xfrm>
+          <a:prstGeom prst="rect">
+            <a:avLst/>
+          </a:prstGeom>
+          <a:noFill/>
+        </p:spPr>
+        <p:txBody>
+          <a:bodyPr wrap="square" anchor="t" lIns="18288" rIns="18288" tIns="18288" bIns="18288">
+            <a:spAutoFit/>
+          </a:bodyPr>
+          <a:lstStyle/>
+          <a:p>
+            <a:pPr algn="l">
+              <a:spcAft>
+                <a:spcPts val="400"/>
+              </a:spcAft>
+            </a:pPr>
+            <a:r>
+              <a:rPr sz="6000" b="1">
+                <a:solidFill>
+                  <a:srgbClr val="C1400B"/>
+                </a:solidFill>
+                <a:latin typeface="Segoe UI"/>
+              </a:rPr>
+              <a:t>75</a:t>
+            </a:r>
+          </a:p>
+        </p:txBody>
+      </p:sp>
+      <p:sp>
+        <p:nvSpPr>
+          <p:cNvPr id="4" name="TextBox 3"/>
+          <p:cNvSpPr txBox="1"/>
+          <p:nvPr/>
+        </p:nvSpPr>
+        <p:spPr>
+          <a:xfrm>
+            <a:off x="676656" y="2727960"/>
+            <a:ext cx="4206240" cy="822960"/>
+          </a:xfrm>
+          <a:prstGeom prst="rect">
+            <a:avLst/>
+          </a:prstGeom>
+          <a:noFill/>
+        </p:spPr>
+        <p:txBody>
+          <a:bodyPr wrap="square" anchor="t" lIns="18288" rIns="18288" tIns="18288" bIns="18288">
+            <a:spAutoFit/>
+          </a:bodyPr>
+          <a:lstStyle/>
+          <a:p>
+            <a:pPr algn="l">
+              <a:spcAft>
+                <a:spcPts val="400"/>
+              </a:spcAft>
+            </a:pPr>
+            <a:r>
+              <a:rPr sz="1500" b="0">
+                <a:solidFill>
+                  <a:srgbClr val="4A5462"/>
+                </a:solidFill>
+                <a:latin typeface="Segoe UI"/>
+              </a:rPr>
+              <a:t>ложных пикселей на отложенном тесте</a:t>
+            </a:r>
+          </a:p>
+        </p:txBody>
+      </p:sp>
+      <p:sp>
+        <p:nvSpPr>
+          <p:cNvPr id="5" name="TextBox 4"/>
+          <p:cNvSpPr txBox="1"/>
+          <p:nvPr/>
+        </p:nvSpPr>
+        <p:spPr>
+          <a:xfrm>
+            <a:off x="649224" y="3520439"/>
+            <a:ext cx="4206240" cy="952500"/>
+          </a:xfrm>
+          <a:prstGeom prst="rect">
+            <a:avLst/>
+          </a:prstGeom>
+          <a:noFill/>
+        </p:spPr>
+        <p:txBody>
+          <a:bodyPr wrap="square" anchor="t" lIns="18288" rIns="18288" tIns="18288" bIns="18288">
+            <a:spAutoFit/>
+          </a:bodyPr>
+          <a:lstStyle/>
+          <a:p>
+            <a:pPr algn="l">
+              <a:spcAft>
+                <a:spcPts val="400"/>
+              </a:spcAft>
+            </a:pPr>
+            <a:r>
+              <a:rPr sz="6000" b="1">
+                <a:solidFill>
+                  <a:srgbClr val="C1400B"/>
+                </a:solidFill>
+                <a:latin typeface="Segoe UI"/>
+              </a:rPr>
+              <a:t>64 %</a:t>
+            </a:r>
+          </a:p>
+        </p:txBody>
+      </p:sp>
+      <p:sp>
+        <p:nvSpPr>
+          <p:cNvPr id="6" name="TextBox 5"/>
+          <p:cNvSpPr txBox="1"/>
+          <p:nvPr/>
+        </p:nvSpPr>
+        <p:spPr>
+          <a:xfrm>
+            <a:off x="676656" y="4511040"/>
+            <a:ext cx="4206240" cy="822960"/>
+          </a:xfrm>
+          <a:prstGeom prst="rect">
+            <a:avLst/>
+          </a:prstGeom>
+          <a:noFill/>
+        </p:spPr>
+        <p:txBody>
+          <a:bodyPr wrap="square" anchor="t" lIns="18288" rIns="18288" tIns="18288" bIns="18288">
+            <a:spAutoFit/>
+          </a:bodyPr>
+          <a:lstStyle/>
+          <a:p>
+            <a:pPr algn="l">
+              <a:spcAft>
+                <a:spcPts val="400"/>
+              </a:spcAft>
+            </a:pPr>
+            <a:r>
+              <a:rPr sz="1500" b="0">
+                <a:solidFill>
+                  <a:srgbClr val="4A5462"/>
+                </a:solidFill>
+                <a:latin typeface="Segoe UI"/>
+              </a:rPr>
+              <a:t>из них — суда и органика</a:t>
+            </a:r>
+          </a:p>
+        </p:txBody>
+      </p:sp>
       <p:pic>
         <p:nvPicPr>
-          <p:cNvPr id="3" name="Picture 2" descr="hard_background.jpg"/>
+          <p:cNvPr id="7" name="Picture 6" descr="defense.png"/>
           <p:cNvPicPr>
             <a:picLocks noChangeAspect="1"/>
           </p:cNvPicPr>
@@ -8128,8 +8284,8 @@
         </p:blipFill>
         <p:spPr>
           <a:xfrm>
-            <a:off x="2318004" y="1691640"/>
-            <a:ext cx="7543800" cy="3017520"/>
+            <a:off x="5769137" y="1737360"/>
+            <a:ext cx="5103805" cy="4206240"/>
           </a:xfrm>
           <a:prstGeom prst="rect">
             <a:avLst/>
@@ -8143,14 +8299,14 @@
       </p:pic>
       <p:sp>
         <p:nvSpPr>
-          <p:cNvPr id="4" name="TextBox 3"/>
+          <p:cNvPr id="8" name="TextBox 7"/>
           <p:cNvSpPr txBox="1"/>
           <p:nvPr/>
         </p:nvSpPr>
         <p:spPr>
           <a:xfrm>
-            <a:off x="649224" y="4846320"/>
-            <a:ext cx="3081527" cy="698500"/>
+            <a:off x="5120640" y="6035040"/>
+            <a:ext cx="6400800" cy="548640"/>
           </a:xfrm>
           <a:prstGeom prst="rect">
             <a:avLst/>
@@ -8165,173 +8321,17 @@
           <a:p>
             <a:pPr algn="l">
               <a:spcAft>
-                <a:spcPts val="400"/>
-              </a:spcAft>
-            </a:pPr>
-            <a:r>
-              <a:rPr sz="4400" b="1">
-                <a:solidFill>
-                  <a:srgbClr val="C1400B"/>
-                </a:solidFill>
-                <a:latin typeface="Segoe UI"/>
-              </a:rPr>
-              <a:t>75</a:t>
-            </a:r>
-          </a:p>
-        </p:txBody>
-      </p:sp>
-      <p:sp>
-        <p:nvSpPr>
-          <p:cNvPr id="5" name="TextBox 4"/>
-          <p:cNvSpPr txBox="1"/>
-          <p:nvPr/>
-        </p:nvSpPr>
-        <p:spPr>
-          <a:xfrm>
-            <a:off x="676656" y="5572760"/>
-            <a:ext cx="3081527" cy="822960"/>
-          </a:xfrm>
-          <a:prstGeom prst="rect">
-            <a:avLst/>
-          </a:prstGeom>
-          <a:noFill/>
-        </p:spPr>
-        <p:txBody>
-          <a:bodyPr wrap="square" anchor="t" lIns="18288" rIns="18288" tIns="18288" bIns="18288">
-            <a:spAutoFit/>
-          </a:bodyPr>
-          <a:lstStyle/>
-          <a:p>
-            <a:pPr algn="l">
-              <a:spcAft>
-                <a:spcPts val="400"/>
-              </a:spcAft>
-            </a:pPr>
-            <a:r>
-              <a:rPr sz="1400" b="0">
+                <a:spcPts val="200"/>
+              </a:spcAft>
+            </a:pPr>
+            <a:r>
+              <a:rPr sz="1200" b="0">
                 <a:solidFill>
                   <a:srgbClr val="4A5462"/>
                 </a:solidFill>
                 <a:latin typeface="Segoe UI"/>
               </a:rPr>
-              <a:t>ложных пикселей на отложенном тесте</a:t>
-            </a:r>
-          </a:p>
-        </p:txBody>
-      </p:sp>
-      <p:sp>
-        <p:nvSpPr>
-          <p:cNvPr id="6" name="TextBox 5"/>
-          <p:cNvSpPr txBox="1"/>
-          <p:nvPr/>
-        </p:nvSpPr>
-        <p:spPr>
-          <a:xfrm>
-            <a:off x="3913631" y="4846320"/>
-            <a:ext cx="3081527" cy="698500"/>
-          </a:xfrm>
-          <a:prstGeom prst="rect">
-            <a:avLst/>
-          </a:prstGeom>
-          <a:noFill/>
-        </p:spPr>
-        <p:txBody>
-          <a:bodyPr wrap="square" anchor="t" lIns="18288" rIns="18288" tIns="18288" bIns="18288">
-            <a:spAutoFit/>
-          </a:bodyPr>
-          <a:lstStyle/>
-          <a:p>
-            <a:pPr algn="l">
-              <a:spcAft>
-                <a:spcPts val="400"/>
-              </a:spcAft>
-            </a:pPr>
-            <a:r>
-              <a:rPr sz="4400" b="1">
-                <a:solidFill>
-                  <a:srgbClr val="C1400B"/>
-                </a:solidFill>
-                <a:latin typeface="Segoe UI"/>
-              </a:rPr>
-              <a:t>64 %</a:t>
-            </a:r>
-          </a:p>
-        </p:txBody>
-      </p:sp>
-      <p:sp>
-        <p:nvSpPr>
-          <p:cNvPr id="7" name="TextBox 6"/>
-          <p:cNvSpPr txBox="1"/>
-          <p:nvPr/>
-        </p:nvSpPr>
-        <p:spPr>
-          <a:xfrm>
-            <a:off x="3941063" y="5572760"/>
-            <a:ext cx="3081527" cy="822960"/>
-          </a:xfrm>
-          <a:prstGeom prst="rect">
-            <a:avLst/>
-          </a:prstGeom>
-          <a:noFill/>
-        </p:spPr>
-        <p:txBody>
-          <a:bodyPr wrap="square" anchor="t" lIns="18288" rIns="18288" tIns="18288" bIns="18288">
-            <a:spAutoFit/>
-          </a:bodyPr>
-          <a:lstStyle/>
-          <a:p>
-            <a:pPr algn="l">
-              <a:spcAft>
-                <a:spcPts val="400"/>
-              </a:spcAft>
-            </a:pPr>
-            <a:r>
-              <a:rPr sz="1400" b="0">
-                <a:solidFill>
-                  <a:srgbClr val="4A5462"/>
-                </a:solidFill>
-                <a:latin typeface="Segoe UI"/>
-              </a:rPr>
-              <a:t>из них — суда и органика</a:t>
-            </a:r>
-          </a:p>
-        </p:txBody>
-      </p:sp>
-      <p:sp>
-        <p:nvSpPr>
-          <p:cNvPr id="8" name="TextBox 7"/>
-          <p:cNvSpPr txBox="1"/>
-          <p:nvPr/>
-        </p:nvSpPr>
-        <p:spPr>
-          <a:xfrm>
-            <a:off x="7315200" y="4983480"/>
-            <a:ext cx="4206240" cy="1097280"/>
-          </a:xfrm>
-          <a:prstGeom prst="rect">
-            <a:avLst/>
-          </a:prstGeom>
-          <a:noFill/>
-        </p:spPr>
-        <p:txBody>
-          <a:bodyPr wrap="square" anchor="t" lIns="18288" rIns="18288" tIns="18288" bIns="18288">
-            <a:spAutoFit/>
-          </a:bodyPr>
-          <a:lstStyle/>
-          <a:p>
-            <a:pPr algn="l">
-              <a:spcAft>
-                <a:spcPts val="400"/>
-              </a:spcAft>
-            </a:pPr>
-            <a:r>
-              <a:rPr sz="1300" b="0">
-                <a:solidFill>
-                  <a:srgbClr val="4A5462"/>
-                </a:solidFill>
-                <a:latin typeface="Segoe UI"/>
-              </a:rPr>
-              <a:t>Верно найдено · пропуск · судно · пена · «анализ невозможен» — на отложенном тесте MARIDA</a:t>
+              <a:t>Пять примеров из сервиса («Проверка качества»): верно · пропуск · судно · пена · «анализ невозможен»</a:t>
             </a:r>
           </a:p>
         </p:txBody>

--- a/presentation/deck_latest.pptx
+++ b/presentation/deck_latest.pptx
@@ -17,7 +17,6 @@
     <p:sldId id="265" r:id="rId17"/>
     <p:sldId id="266" r:id="rId18"/>
     <p:sldId id="267" r:id="rId19"/>
-    <p:sldId id="268" r:id="rId20"/>
   </p:sldIdLst>
   <p:sldSz cx="12191695" cy="6858000" type="screen4x3"/>
   <p:notesSz cx="6858000" cy="9144000"/>
@@ -514,7 +513,13 @@
           <a:lstStyle/>
           <a:p>
             <a:r>
-              <a:t>Мусор в море виден из космоса полосами, и мы находим их и честно считаем штуки там, где их можно измерить. Мы команда SAMARKAND. Наша задача в кейсе — по снимкам Sentinel-2 найти скопления плавающего мусора, оценить, сколько там предметов, и показать это экологу так, чтобы он понимал, чему можно верить. За эти дни мы собрали три вещи. Детектор, который на отложенных сценах MARIDA отличает мусор от воды, судов и пены. Полевой счёт штук на квадратный километр с честным интервалом. И счётчик предметов на детальном фото. Главное, что мы узнали по дороге: снимок показывает, где мусор, но не сколько в нём штук. Мы проверили это на всех парах «снимок — полевой счёт», которые смогли найти, и поэтому число штук по снимку мы не выдаём за измерение. Дальше — команда, проблема и три ступени решения.</a:t>
+              <a:t>Мусор в море виден из космоса полосами. Мы находим их и честно считаем штуки там, где их можно измерить. Мы команда SAMARKAND. По снимкам Sentinel-2 мы находим скопления плавающего мусора, оцениваем, сколько там предметов, и показываем экологу, чему можно верить.</a:t>
+            </a:r>
+          </a:p>
+          <a:p/>
+          <a:p>
+            <a:r>
+              <a:t>[0:00–0:18]</a:t>
             </a:r>
           </a:p>
         </p:txBody>
@@ -584,7 +589,13 @@
           <a:lstStyle/>
           <a:p>
             <a:r>
-              <a:t>На детальном фото модель считает предметы с ошибкой 0.59 штуки на кадр и определяет материал. Это третья ступень: фото с воды или с дрона, где предмет виден целиком. Мы обучили детектор объектов на открытом наборе FML и разбили его по сессиям съёмки, чтобы соседние кадры одной съёмки не попали и в обучение, и в тест. На отложенных кадрах ошибка счёта 0.59 предмета, а у бейзлайна «всегда медиана» — 2.86. На аэрофото берега Winans, где известна площадь кадра, наша ошибка 1.85 штуки против 2.29 у открытого DebrisScan, и правило замены было записано до сравнения. Материал модель называет по классам, но число по классам мы показываем только там, где есть разметка и матрица ошибок. Штуки на квадратный километр по фото мы считаем только там, где известна площадь кадра, как у Winans. Для кадров без площади единица — штуки на кадр. И это не спутник: Sentinel-2 так не считает.</a:t>
+              <a:t>На детальном фото модель считает предметы с ошибкой 0.59 шт. на кадр и определяет материал. Это фото с воды или дрона, где предмет виден целиком. На отложенных сессиях FML ошибка 0.59 предмета на кадр, у бейзлайна 2.86; на аэрофото Winans мы лучше открытого DebrisScan.</a:t>
+            </a:r>
+          </a:p>
+          <a:p/>
+          <a:p>
+            <a:r>
+              <a:t>[3:40–4:00]</a:t>
             </a:r>
           </a:p>
         </p:txBody>
@@ -654,7 +665,13 @@
           <a:lstStyle/>
           <a:p>
             <a:r>
-              <a:t>Эколог сразу видит, что найдено, где, когда и насколько этому верить. Путь такой: глобус с районами, клик по району — сцена с контурами зон, клик по зоне — карточка. Первая строка карточки — что это: плавающий материал по классу MARIDA, пластик не подтверждён. Дальше статус — один из четырёх по постановке, и отдельной строкой подтверждение: совпадает ли зона с независимой разметкой. В блоке количества прямо написано: количество предметов по этому снимку не определено, а исследовательский сценарий свёрнут и подписан оговорками. Рядом — ближайшее полевое измерение, но не как плотность этой зоны. Всё, что отфильтровано, выгружается в GeoJSON и CSV, а запрос можно сохранить и повторить. Если источник данных недоступен, сервис пишет «данные недоступны», а не «ноль зон». Находки на снимках из обучения помечены и не считаются. Так эколог отличает отсутствие мусора от отсутствия данных.</a:t>
+              <a:t>Эколог за пять шагов видит, что найдено, где, когда и насколько этому верить. Кнопка «Демо» проводит по шагам: район и даты, снимок с нумерованными зонами, карточка зоны, качество и статус, выгрузка. Первая строка карточки — что это: плавающий материал, пластик не подтверждён. Дальше статус, подтверждение независимой разметкой и прямо: количество предметов по этому снимку не определено; рядом — оценка по полю. Всё отфильтрованное выгружается в GeoJSON и CSV. Показываем это вживую в сервисе, кнопка «Демо», около полутора минут.</a:t>
+            </a:r>
+          </a:p>
+          <a:p/>
+          <a:p>
+            <a:r>
+              <a:t>[4:00–6:06]</a:t>
             </a:r>
           </a:p>
         </p:txBody>
@@ -724,77 +741,13 @@
           <a:lstStyle/>
           <a:p>
             <a:r>
-              <a:t>Одна команда воспроизводит все числа из чистой копии. Мы клонировали репозиторий на чистую машину: от клона до открытой карты и пересчитанных чисел — 7,5 минуты. В проекте 255 автотестов; отдельные тесты сверяют каждое число в документах и этой презентации с единым файлом итоговых чисел, где у каждого числа есть источник и протокол. Веса моделей лежат в репозитории, поэтому ничего не нужно обучать заново. Правила выбора моделей мы записывали до сравнения: например, модель поля берётся, только если она лучше медианы на отложенном рейсе. Это защищает от подгонки под тест. Файл итоговых чисел пересобирается одной командой после любого пересчёта, и документы с этой презентацией собираются из него скриптом. Если число в тексте разойдётся с файлом, тест упадёт. Поэтому то, что вы видите на слайдах, совпадает с тем, что считает код.</a:t>
-            </a:r>
-          </a:p>
-        </p:txBody>
-      </p:sp>
-      <p:sp>
-        <p:nvSpPr>
-          <p:cNvPr id="4" name="Slide Number Placeholder 3"/>
-          <p:cNvSpPr>
-            <a:spLocks noGrp="1"/>
-          </p:cNvSpPr>
-          <p:nvPr>
-            <p:ph type="sldNum" idx="5" sz="quarter"/>
-          </p:nvPr>
-        </p:nvSpPr>
-        <p:spPr/>
-      </p:sp>
-    </p:spTree>
-  </p:cSld>
-  <p:clrMapOvr>
-    <a:masterClrMapping/>
-  </p:clrMapOvr>
-</p:notes>
-</file>
-
-<file path=ppt/notesSlides/notesSlide13.xml><?xml version="1.0" encoding="utf-8"?>
-<p:notes xmlns:a="http://schemas.openxmlformats.org/drawingml/2006/main" xmlns:p="http://schemas.openxmlformats.org/presentationml/2006/main" xmlns:r="http://schemas.openxmlformats.org/officeDocument/2006/relationships">
-  <p:cSld>
-    <p:spTree>
-      <p:nvGrpSpPr>
-        <p:cNvPr id="1" name=""/>
-        <p:cNvGrpSpPr/>
-        <p:nvPr/>
-      </p:nvGrpSpPr>
-      <p:grpSpPr>
-        <a:xfrm>
-          <a:off x="0" y="0"/>
-          <a:ext cx="0" cy="0"/>
-          <a:chOff x="0" y="0"/>
-          <a:chExt cx="0" cy="0"/>
-        </a:xfrm>
-      </p:grpSpPr>
-      <p:sp>
-        <p:nvSpPr>
-          <p:cNvPr id="2" name="Slide Image Placeholder 1"/>
-          <p:cNvSpPr>
-            <a:spLocks noGrp="1"/>
-          </p:cNvSpPr>
-          <p:nvPr>
-            <p:ph type="sldImg" idx="2"/>
-          </p:nvPr>
-        </p:nvSpPr>
-        <p:spPr/>
-      </p:sp>
-      <p:sp>
-        <p:nvSpPr>
-          <p:cNvPr id="3" name="Notes Placeholder 2"/>
-          <p:cNvSpPr>
-            <a:spLocks noGrp="1"/>
-          </p:cNvSpPr>
-          <p:nvPr>
-            <p:ph type="body" idx="3" sz="quarter"/>
-          </p:nvPr>
-        </p:nvSpPr>
-        <p:spPr/>
-        <p:txBody>
-          <a:bodyPr/>
-          <a:lstStyle/>
-          <a:p>
-            <a:r>
-              <a:t>Три числа, которые стоит запомнить. Детектор находит полосы мусора с F1 0.871 на отложенном тесте. Поле даёт 53.9 штуки на квадратный километр с честным интервалом. И 66 пар «снимок — поле» мы проверили и показали, почему штуки по снимку пока не измеряются. Всего за эти дни мы проверили 71 гипотезу и эксперименты, и каждое решение записано до сравнения. Спасибо, готовы к вопросам.</a:t>
+              <a:t>Три числа: F1 0.871 у детектора, 53.9 штуки на квадратный километр по полю и все проверенные гипотезы записаны до сравнения. Спасибо, готовы к вопросам.</a:t>
+            </a:r>
+          </a:p>
+          <a:p/>
+          <a:p>
+            <a:r>
+              <a:t>[6:06–6:17]</a:t>
             </a:r>
           </a:p>
         </p:txBody>
@@ -864,7 +817,13 @@
           <a:lstStyle/>
           <a:p>
             <a:r>
-              <a:t>Наша команда — пять человек: Матвей, Егор, Марк, Фёдор и Глеб. Мы делили работу на данные и поиск пар, модели, сервис и проверку. Каждое число в этой презентации взято из одного файла с источником и протоколом, и каждое решение записано до сравнения.</a:t>
+              <a:t>Наша команда — Матвей, Егор, Марк, Фёдор и Глеб.</a:t>
+            </a:r>
+          </a:p>
+          <a:p/>
+          <a:p>
+            <a:r>
+              <a:t>[0:18–0:26]</a:t>
             </a:r>
           </a:p>
         </p:txBody>
@@ -934,7 +893,13 @@
           <a:lstStyle/>
           <a:p>
             <a:r>
-              <a:t>Спутник видит пиксель 10 м, а предмет — 2.5–50 см: прямого счёта штук по снимку не существует. Предмет в море — бутылка, пакет, обрывок сети — в сотни раз меньше пикселя Sentinel-2. В пикселе он занимает ничтожную долю, и спектр пикселя почти не меняется. Чтобы научить модель считать штуки, нужны пары: снимок и полевой счёт в то же время в том же месте. Мы прошли все 318 событий CSV организаторов: снимок рядом по времени есть у части, по метаданным остаётся 29, после масок облаков и блика — 12, а синхронных с учётом дрейфа — ноль. Отдельно мы нашли 66 пар по месту и времени в данных ADIS, но видимого сигнала мусора на снимке нет ни в одной. Это не недоработка поиска, а физика: спутник видит скопление, а не отдельный предмет. Поэтому решение устроено ступенями.</a:t>
+              <a:t>Спутник видит пиксель 10 м, а предмет — 2.5–50 см: прямого счёта штук по снимку не существует. Предмет — бутылка или обрывок сети — в сотни раз меньше пикселя и почти не меняет его спектр. Чтобы считать штуки по снимку, нужны пары «снимок — полевой счёт» в одно время и в одном месте. Из 318 событий CSV организаторов синхронных пар ноль; в данных ADIS мы нашли 66 пар по месту и времени, но видимого сигнала нет ни в одной. Это физика, а не недоработка поиска.</a:t>
+            </a:r>
+          </a:p>
+          <a:p/>
+          <a:p>
+            <a:r>
+              <a:t>[0:26–1:05]</a:t>
             </a:r>
           </a:p>
         </p:txBody>
@@ -1004,7 +969,13 @@
           <a:lstStyle/>
           <a:p>
             <a:r>
-              <a:t>Три ступени: спутник находит зоны, поле даёт штуки на квадратный километр, детальное фото считает предметы. Первая ступень — детектор на спектрах Sentinel-2: он отвечает, где и когда есть полоса мусора; на отложенном тесте MARIDA у него F1 0.871. Вторая — полевой счёт: люди с судна считают предметы на полосе известной ширины, и мы делим число предметов на площадь; по отложенному рейсу это 53.9 штуки на квадратный километр с честным интервалом. Третья — детальное фото, где предмет виден целиком: модель считает предметы с ошибкой 0.59 штуки на кадр. У каждой ступени своя единица и своя проверка. Между ступенями мост возможен только через пары, а их нет, поэтому мы не переводим площадь полосы на снимке в штуки и прямо пишем это в интерфейсе.</a:t>
+              <a:t>Три ступени: спутник находит зоны, поле даёт шт./км², детальное фото считает предметы. Детектор на Sentinel-2 отвечает, где и когда есть полоса мусора: F1 0.871 на отложенном тесте. Полевой счёт даёт 53.9 штуки на квадратный километр — это независимая оценка количества. Детальное фото считает предметы с ошибкой 0.59 штуки на кадр. Мост между ступенями возможен только через пары, поэтому площадь полосы в штуки мы не переводим.</a:t>
+            </a:r>
+          </a:p>
+          <a:p/>
+          <a:p>
+            <a:r>
+              <a:t>[1:05–1:35]</a:t>
             </a:r>
           </a:p>
         </p:txBody>
@@ -1074,7 +1045,13 @@
           <a:lstStyle/>
           <a:p>
             <a:r>
-              <a:t>LightGBM на спектрах бьёт U-Net и индекс FDI на отложенном тесте MARIDA. Мы сравнили четыре подхода на одних и тех же сценах, которые модель не видела при обучении и подборе порога. Градиентный бустинг по спектральным признакам даёт F1 0.871, случайный лес — 0.771, U-Net — 0.501, а классический индекс плавающего мусора FDI с порогом — 0.042. Почему бустинг, а не нейросеть: полосы мусора узкие, в несколько пикселей, и разметки мало, поэтому признаки пикселя и его соседей работают лучше, чем свёртки. Важно, что класс MARIDA — это любой плавающий мусор, а не только пластик, и оценка детектора — не вероятность. Поэтому в сервисе мы пишем «оценка детектора» и «плавающий материал», а не «пластик». Порог детектора мы выбирали только на валидационных сценах, а тест открыли один раз. Интервал F1 посчитан бутстрепом по сценам, поэтому он учитывает, что сцены сильно отличаются друг от друга.</a:t>
+              <a:t>LightGBM на спектрах бьёт U-Net и индекс FDI на отложенном тесте MARIDA. На сценах, которых модель не видела, бустинг даёт F1 0.871, U-Net — 0.501, индекс FDI — 0.042. Полосы узкие, разметки мало — признаки пикселя работают лучше свёрток. Класс MARIDA — любой плавающий мусор, поэтому мы пишем «плавающий материал», а не «пластик».</a:t>
+            </a:r>
+          </a:p>
+          <a:p/>
+          <a:p>
+            <a:r>
+              <a:t>[1:35–1:59]</a:t>
             </a:r>
           </a:p>
         </p:txBody>
@@ -1144,7 +1121,13 @@
           <a:lstStyle/>
           <a:p>
             <a:r>
-              <a:t>На отложенной сцене 14 находок совпали с полосами, проверенными людьми. Это сцена 30SXE у Альборана за 11.03.2021; модель её не видела. Детектор выделил 23 зон, и 14 из них совпадают с нитями мусора, которые авторы Cózar 2024 разметили вручную. Всего мы обработали 286 зон на сценах и оставили 77 находок: остальные отсеяны фильтрами судов и кильватера, пены, блика, облаков, или там ветер сильнее 5 метров в секунду, когда мусор уходит под воду и снимок не информативен. Каждая зона получает один из четырёх статусов: обнаружено, не обнаружено, недостаточно данных, анализ невозможен. Статус «подтверждено» ставит только человек. На снимке справа видны контуры зон поверх нитей мусора. Сцена не входила в обучение MARIDA, поэтому совпадения с ручной разметкой — независимая проверка, а не повторение обучающих данных. Совпадение с разметкой мы показываем в карточке отдельной строкой «Подтверждение», а не смешиваем со статусом. Если независимой разметки нет, карточка так и пишет.</a:t>
+              <a:t>На отложенной сцене 14 находок совпали с полосами, проверенными людьми (Cózar 2024). Сцена 30SXE не входила в обучение; 14 из 23 зон совпали с ручной разметкой нитей. Всего из 286 обработанных зон мы оставили 77 находок: суда, пена, блик, облака и сильный ветер отфильтрованы. Статус «подтверждено» ставит только человек.</a:t>
+            </a:r>
+          </a:p>
+          <a:p/>
+          <a:p>
+            <a:r>
+              <a:t>[1:59–2:22]</a:t>
             </a:r>
           </a:p>
         </p:txBody>
@@ -1214,7 +1197,13 @@
           <a:lstStyle/>
           <a:p>
             <a:r>
-              <a:t>Мы отличаем мусор от судов, пены, бликов, облаков и берега. На этом слайде пять примеров прямо из сервиса, раздел «Проверка качества»: полоса, найденная верно; пропуск, когда детектор отметил только малую часть нити; судно с кильватером, которое спектрально похоже на мусор; пена, которую поймал фильтр; и снимок, где анализ невозможен из-за низкого солнца. Всего на тесте 75 ложных пикселей, и 64 процентов из них — суда и природная органика. Поэтому после детектора стоят фильтры: маска судов и кильватера, маска пены, блика и облаков по SCL, ветер по ERA5. Если снимок закрыт облаками или на нём блик, зона получает статус «анализ невозможен», а не «чисто». Это важно для эколога: отсутствие находки на плохом снимке ничего не говорит о воде. Для каждой причины ошибки у нас есть отдельный признак, который эколог видит в карточке: что исключено и что не проверяется. Например, водоросли и мутные речные шлейфы детектор не отличает надёжно, и мы пишем об этом прямо.</a:t>
+              <a:t>Мы отличаем мусор от судов, пены, бликов, облаков и берега. Здесь пять примеров прямо из сервиса: верное обнаружение, пропуск, судно, пена и снимок, где анализ невозможен. На тесте 64 процентов ложных пикселей — суда и органика, поэтому после детектора стоят фильтры, а плохой снимок получает «анализ невозможен», а не «чисто».</a:t>
+            </a:r>
+          </a:p>
+          <a:p/>
+          <a:p>
+            <a:r>
+              <a:t>[2:22–2:45]</a:t>
             </a:r>
           </a:p>
         </p:txBody>
@@ -1284,7 +1273,13 @@
           <a:lstStyle/>
           <a:p>
             <a:r>
-              <a:t>По полевым данным 53.9 штуки на квадратный километр, а на отложенном тесте простая медиана лучше модели, и мы показываем медиану. Считаем так: наблюдатели с судна считают предметы на полосе известной ширины; число предметов делим на площадь полосы. Интервал от 39.7 до 70.4 — бутстреп по дням рейса; он учитывает, что дни сильно отличаются друг от друга, и потому шире, чем интервал только по ошибке счёта. Мы пробовали предсказывать концентрацию моделью по месту и времени: на отложенном рейсе у модели средняя ошибка 30.0, а у медианы 25.2. Правило было записано заранее: модель берём, только если она лучше медианы. Она не лучше — значит, честный ответ сервиса по полю — медиана с интервалом. Поле — это не снимок. Полевое число мы показываем в отдельном слое «Полевые измерения», а в карточке спутниковой зоны пишем только расстояние до ближайшего полевого измерения, не выдавая чужое число за плотность этой зоны.</a:t>
+              <a:t>По полевым данным 53.9 шт./км² [39.7–70.4]; на отложенном тесте простая медиана лучше модели — показываем её. Число предметов на полосе делим на её площадь; интервал — бутстреп по дням рейса. У модели ошибка 30.0, у медианы 25.2; правило было записано заранее. Это и есть независимая оценка количества по полевым данным.</a:t>
+            </a:r>
+          </a:p>
+          <a:p/>
+          <a:p>
+            <a:r>
+              <a:t>[2:45–3:08]</a:t>
             </a:r>
           </a:p>
         </p:txBody>
@@ -1354,7 +1349,13 @@
           <a:lstStyle/>
           <a:p>
             <a:r>
-              <a:t>Мы проверили связку снимок — штуки на всех найденных парах, и посчитанные предметы спутнику не видны. Главный источник — ADIS: 21 444 отрезков наблюдений с судов; из них 66 совпадают со снимком по месту и времени. В 6 таких парах в поле есть предметы, и ни в одной детектор не сработал на полосе наблюдения. Мы проверили итальянские трансекты ISPRA и нашли одну пару по месту и дню — ER604; на карте видно, что предметы, посчитанные людьми, не лежат рядом с пикселями, где сработал детектор. Проверили искусственные мишени проекта PLP: детектор видит пиксель, только когда мишень закрывает заметную долю пикселя. Вывод: одиночные предметы, которые считают люди, спутнику не видны, а плотные нити, которые видит спутник, никто не считал поштучно. Поэтому число штук по снимку в сервисе — только исследовательский сценарий с оговорками.</a:t>
+              <a:t>Мы проверили связку снимок → штуки на всех найденных парах — посчитанные предметы спутнику не видны. Из 21 444 отрезков ADIS 66 совпали со снимком по месту и времени; в 6 с предметами детектор не сработал. На паре ISPRA посчитанные предметы лежат не рядом с пикселями детектора. Одиночные предметы спутнику не видны, а плотные нити никто не считал поштучно — поэтому штуки по снимку в сервисе только исследовательский сценарий.</a:t>
+            </a:r>
+          </a:p>
+          <a:p/>
+          <a:p>
+            <a:r>
+              <a:t>[3:08–3:40]</a:t>
             </a:r>
           </a:p>
         </p:txBody>
@@ -4767,8 +4768,8 @@
         </p:nvSpPr>
         <p:spPr>
           <a:xfrm>
-            <a:off x="5120640" y="6035040"/>
-            <a:ext cx="6400800" cy="548640"/>
+            <a:off x="5120640" y="5897880"/>
+            <a:ext cx="5394960" cy="731520"/>
           </a:xfrm>
           <a:prstGeom prst="rect">
             <a:avLst/>
@@ -4848,7 +4849,7 @@
                 </a:solidFill>
                 <a:latin typeface="Segoe UI"/>
               </a:rPr>
-              <a:t>10 / 13</a:t>
+              <a:t>10 / 12</a:t>
             </a:r>
           </a:p>
         </p:txBody>
@@ -4913,7 +4914,7 @@
                 </a:solidFill>
                 <a:latin typeface="Segoe UI"/>
               </a:rPr>
-              <a:t>Эколог сразу видит, что найдено, где, когда и насколько этому верить</a:t>
+              <a:t>Эколог за пять шагов видит, что найдено, где, когда и насколько этому верить</a:t>
             </a:r>
           </a:p>
         </p:txBody>
@@ -5111,8 +5112,8 @@
         </p:nvSpPr>
         <p:spPr>
           <a:xfrm>
-            <a:off x="5120640" y="6035040"/>
-            <a:ext cx="6400800" cy="548640"/>
+            <a:off x="5120640" y="5897880"/>
+            <a:ext cx="5394960" cy="731520"/>
           </a:xfrm>
           <a:prstGeom prst="rect">
             <a:avLst/>
@@ -5137,23 +5138,23 @@
                 </a:solidFill>
                 <a:latin typeface="Segoe UI"/>
               </a:rPr>
+              <a:t>«Демо ▶»: Район и даты → Снимок → Зона → Качество и статус → Выгрузка</a:t>
+            </a:r>
+          </a:p>
+          <a:p>
+            <a:pPr algn="l">
+              <a:spcAft>
+                <a:spcPts val="200"/>
+              </a:spcAft>
+            </a:pPr>
+            <a:r>
+              <a:rPr sz="1200" b="0">
+                <a:solidFill>
+                  <a:srgbClr val="4A5462"/>
+                </a:solidFill>
+                <a:latin typeface="Segoe UI"/>
+              </a:rPr>
               <a:t>Карточка: «Что это» · статус · подтверждение · «Количество предметов по этому снимку не определено»</a:t>
-            </a:r>
-          </a:p>
-          <a:p>
-            <a:pPr algn="l">
-              <a:spcAft>
-                <a:spcPts val="200"/>
-              </a:spcAft>
-            </a:pPr>
-            <a:r>
-              <a:rPr sz="1200" b="0">
-                <a:solidFill>
-                  <a:srgbClr val="4A5462"/>
-                </a:solidFill>
-                <a:latin typeface="Segoe UI"/>
-              </a:rPr>
-              <a:t>Земля → сцена → зона → студия запросов → назад к карте; сохранённые запросы</a:t>
             </a:r>
           </a:p>
         </p:txBody>
@@ -5192,7 +5193,7 @@
                 </a:solidFill>
                 <a:latin typeface="Segoe UI"/>
               </a:rPr>
-              <a:t>11 / 13</a:t>
+              <a:t>11 / 12</a:t>
             </a:r>
           </a:p>
         </p:txBody>
@@ -5206,419 +5207,6 @@
 </file>
 
 <file path=ppt/slides/slide12.xml><?xml version="1.0" encoding="utf-8"?>
-<p:sld xmlns:a="http://schemas.openxmlformats.org/drawingml/2006/main" xmlns:p="http://schemas.openxmlformats.org/presentationml/2006/main" xmlns:r="http://schemas.openxmlformats.org/officeDocument/2006/relationships">
-  <p:cSld>
-    <p:bg>
-      <p:bgPr>
-        <a:solidFill>
-          <a:srgbClr val="F9F8F6"/>
-        </a:solidFill>
-        <a:effectLst/>
-      </p:bgPr>
-    </p:bg>
-    <p:spTree>
-      <p:nvGrpSpPr>
-        <p:cNvPr id="1" name=""/>
-        <p:cNvGrpSpPr/>
-        <p:nvPr/>
-      </p:nvGrpSpPr>
-      <p:grpSpPr/>
-      <p:sp>
-        <p:nvSpPr>
-          <p:cNvPr id="2" name="TextBox 1"/>
-          <p:cNvSpPr txBox="1"/>
-          <p:nvPr/>
-        </p:nvSpPr>
-        <p:spPr>
-          <a:xfrm>
-            <a:off x="649224" y="384048"/>
-            <a:ext cx="10881360" cy="1234440"/>
-          </a:xfrm>
-          <a:prstGeom prst="rect">
-            <a:avLst/>
-          </a:prstGeom>
-          <a:noFill/>
-        </p:spPr>
-        <p:txBody>
-          <a:bodyPr wrap="square" anchor="t" lIns="18288" rIns="18288" tIns="18288" bIns="18288">
-            <a:spAutoFit/>
-          </a:bodyPr>
-          <a:lstStyle/>
-          <a:p>
-            <a:pPr algn="l">
-              <a:spcAft>
-                <a:spcPts val="400"/>
-              </a:spcAft>
-            </a:pPr>
-            <a:r>
-              <a:rPr sz="3200" b="1">
-                <a:solidFill>
-                  <a:srgbClr val="1E2836"/>
-                </a:solidFill>
-                <a:latin typeface="Segoe UI"/>
-              </a:rPr>
-              <a:t>Одна команда воспроизводит все числа из чистой копии</a:t>
-            </a:r>
-          </a:p>
-        </p:txBody>
-      </p:sp>
-      <p:sp>
-        <p:nvSpPr>
-          <p:cNvPr id="3" name="TextBox 2"/>
-          <p:cNvSpPr txBox="1"/>
-          <p:nvPr/>
-        </p:nvSpPr>
-        <p:spPr>
-          <a:xfrm>
-            <a:off x="649224" y="1783080"/>
-            <a:ext cx="5166360" cy="1047749"/>
-          </a:xfrm>
-          <a:prstGeom prst="rect">
-            <a:avLst/>
-          </a:prstGeom>
-          <a:noFill/>
-        </p:spPr>
-        <p:txBody>
-          <a:bodyPr wrap="square" anchor="t" lIns="18288" rIns="18288" tIns="18288" bIns="18288">
-            <a:spAutoFit/>
-          </a:bodyPr>
-          <a:lstStyle/>
-          <a:p>
-            <a:pPr algn="l">
-              <a:spcAft>
-                <a:spcPts val="400"/>
-              </a:spcAft>
-            </a:pPr>
-            <a:r>
-              <a:rPr sz="6600" b="1">
-                <a:solidFill>
-                  <a:srgbClr val="C1400B"/>
-                </a:solidFill>
-                <a:latin typeface="Segoe UI"/>
-              </a:rPr>
-              <a:t>7,5 мин</a:t>
-            </a:r>
-          </a:p>
-        </p:txBody>
-      </p:sp>
-      <p:sp>
-        <p:nvSpPr>
-          <p:cNvPr id="4" name="TextBox 3"/>
-          <p:cNvSpPr txBox="1"/>
-          <p:nvPr/>
-        </p:nvSpPr>
-        <p:spPr>
-          <a:xfrm>
-            <a:off x="676656" y="2872740"/>
-            <a:ext cx="5166360" cy="822960"/>
-          </a:xfrm>
-          <a:prstGeom prst="rect">
-            <a:avLst/>
-          </a:prstGeom>
-          <a:noFill/>
-        </p:spPr>
-        <p:txBody>
-          <a:bodyPr wrap="square" anchor="t" lIns="18288" rIns="18288" tIns="18288" bIns="18288">
-            <a:spAutoFit/>
-          </a:bodyPr>
-          <a:lstStyle/>
-          <a:p>
-            <a:pPr algn="l">
-              <a:spcAft>
-                <a:spcPts val="400"/>
-              </a:spcAft>
-            </a:pPr>
-            <a:r>
-              <a:rPr sz="1600" b="0">
-                <a:solidFill>
-                  <a:srgbClr val="4A5462"/>
-                </a:solidFill>
-                <a:latin typeface="Segoe UI"/>
-              </a:rPr>
-              <a:t>чистый клон → карта и числа</a:t>
-            </a:r>
-          </a:p>
-        </p:txBody>
-      </p:sp>
-      <p:sp>
-        <p:nvSpPr>
-          <p:cNvPr id="5" name="TextBox 4"/>
-          <p:cNvSpPr txBox="1"/>
-          <p:nvPr/>
-        </p:nvSpPr>
-        <p:spPr>
-          <a:xfrm>
-            <a:off x="6089904" y="1783080"/>
-            <a:ext cx="5166360" cy="1143000"/>
-          </a:xfrm>
-          <a:prstGeom prst="rect">
-            <a:avLst/>
-          </a:prstGeom>
-          <a:noFill/>
-        </p:spPr>
-        <p:txBody>
-          <a:bodyPr wrap="square" anchor="t" lIns="18288" rIns="18288" tIns="18288" bIns="18288">
-            <a:spAutoFit/>
-          </a:bodyPr>
-          <a:lstStyle/>
-          <a:p>
-            <a:pPr algn="l">
-              <a:spcAft>
-                <a:spcPts val="400"/>
-              </a:spcAft>
-            </a:pPr>
-            <a:r>
-              <a:rPr sz="7200" b="1">
-                <a:solidFill>
-                  <a:srgbClr val="C1400B"/>
-                </a:solidFill>
-                <a:latin typeface="Segoe UI"/>
-              </a:rPr>
-              <a:t>255</a:t>
-            </a:r>
-          </a:p>
-        </p:txBody>
-      </p:sp>
-      <p:sp>
-        <p:nvSpPr>
-          <p:cNvPr id="6" name="TextBox 5"/>
-          <p:cNvSpPr txBox="1"/>
-          <p:nvPr/>
-        </p:nvSpPr>
-        <p:spPr>
-          <a:xfrm>
-            <a:off x="6117336" y="2971800"/>
-            <a:ext cx="5166360" cy="822960"/>
-          </a:xfrm>
-          <a:prstGeom prst="rect">
-            <a:avLst/>
-          </a:prstGeom>
-          <a:noFill/>
-        </p:spPr>
-        <p:txBody>
-          <a:bodyPr wrap="square" anchor="t" lIns="18288" rIns="18288" tIns="18288" bIns="18288">
-            <a:spAutoFit/>
-          </a:bodyPr>
-          <a:lstStyle/>
-          <a:p>
-            <a:pPr algn="l">
-              <a:spcAft>
-                <a:spcPts val="400"/>
-              </a:spcAft>
-            </a:pPr>
-            <a:r>
-              <a:rPr sz="1600" b="0">
-                <a:solidFill>
-                  <a:srgbClr val="4A5462"/>
-                </a:solidFill>
-                <a:latin typeface="Segoe UI"/>
-              </a:rPr>
-              <a:t>автотестов</a:t>
-            </a:r>
-          </a:p>
-        </p:txBody>
-      </p:sp>
-      <p:sp>
-        <p:nvSpPr>
-          <p:cNvPr id="7" name="TextBox 6"/>
-          <p:cNvSpPr txBox="1"/>
-          <p:nvPr/>
-        </p:nvSpPr>
-        <p:spPr>
-          <a:xfrm>
-            <a:off x="649224" y="3931920"/>
-            <a:ext cx="10881360" cy="1371600"/>
-          </a:xfrm>
-          <a:prstGeom prst="rect">
-            <a:avLst/>
-          </a:prstGeom>
-          <a:noFill/>
-        </p:spPr>
-        <p:txBody>
-          <a:bodyPr wrap="square" anchor="t" lIns="18288" rIns="18288" tIns="18288" bIns="18288">
-            <a:spAutoFit/>
-          </a:bodyPr>
-          <a:lstStyle/>
-          <a:p>
-            <a:pPr algn="l">
-              <a:spcAft>
-                <a:spcPts val="400"/>
-              </a:spcAft>
-            </a:pPr>
-            <a:r>
-              <a:rPr sz="1500" b="0">
-                <a:solidFill>
-                  <a:srgbClr val="4A5462"/>
-                </a:solidFill>
-                <a:latin typeface="Segoe UI"/>
-              </a:rPr>
-              <a:t>Установка 3 мин 17 с, карта открывается за 8,1 с</a:t>
-            </a:r>
-          </a:p>
-          <a:p>
-            <a:pPr algn="l">
-              <a:spcAft>
-                <a:spcPts val="400"/>
-              </a:spcAft>
-            </a:pPr>
-            <a:r>
-              <a:rPr sz="1500" b="0">
-                <a:solidFill>
-                  <a:srgbClr val="4A5462"/>
-                </a:solidFill>
-                <a:latin typeface="Segoe UI"/>
-              </a:rPr>
-              <a:t>Веса моделей в репозитории; все числа — reports/final_numbers.json с источником и протоколом</a:t>
-            </a:r>
-          </a:p>
-          <a:p>
-            <a:pPr algn="l">
-              <a:spcAft>
-                <a:spcPts val="400"/>
-              </a:spcAft>
-            </a:pPr>
-            <a:r>
-              <a:rPr sz="1500" b="0">
-                <a:solidFill>
-                  <a:srgbClr val="4A5462"/>
-                </a:solidFill>
-                <a:latin typeface="Segoe UI"/>
-              </a:rPr>
-              <a:t>Правила принятия решений записаны до сравнения (детектор, поле, счётчик)</a:t>
-            </a:r>
-          </a:p>
-        </p:txBody>
-      </p:sp>
-      <p:sp>
-        <p:nvSpPr>
-          <p:cNvPr id="8" name="Rectangle 7"/>
-          <p:cNvSpPr/>
-          <p:nvPr/>
-        </p:nvSpPr>
-        <p:spPr>
-          <a:xfrm>
-            <a:off x="649224" y="5422392"/>
-            <a:ext cx="10881360" cy="19050"/>
-          </a:xfrm>
-          <a:prstGeom prst="rect">
-            <a:avLst/>
-          </a:prstGeom>
-          <a:solidFill>
-            <a:srgbClr val="A7ADB7"/>
-          </a:solidFill>
-          <a:ln>
-            <a:noFill/>
-          </a:ln>
-        </p:spPr>
-        <p:style>
-          <a:lnRef idx="1">
-            <a:schemeClr val="accent1"/>
-          </a:lnRef>
-          <a:fillRef idx="3">
-            <a:schemeClr val="accent1"/>
-          </a:fillRef>
-          <a:effectRef idx="2">
-            <a:schemeClr val="accent1"/>
-          </a:effectRef>
-          <a:fontRef idx="minor">
-            <a:schemeClr val="lt1"/>
-          </a:fontRef>
-        </p:style>
-        <p:txBody>
-          <a:bodyPr rtlCol="0" anchor="ctr"/>
-          <a:lstStyle/>
-          <a:p>
-            <a:pPr algn="ctr"/>
-          </a:p>
-        </p:txBody>
-      </p:sp>
-      <p:sp>
-        <p:nvSpPr>
-          <p:cNvPr id="9" name="TextBox 8"/>
-          <p:cNvSpPr txBox="1"/>
-          <p:nvPr/>
-        </p:nvSpPr>
-        <p:spPr>
-          <a:xfrm>
-            <a:off x="649224" y="5532120"/>
-            <a:ext cx="10881360" cy="548640"/>
-          </a:xfrm>
-          <a:prstGeom prst="rect">
-            <a:avLst/>
-          </a:prstGeom>
-          <a:noFill/>
-        </p:spPr>
-        <p:txBody>
-          <a:bodyPr wrap="square" anchor="t" lIns="18288" rIns="18288" tIns="18288" bIns="18288">
-            <a:spAutoFit/>
-          </a:bodyPr>
-          <a:lstStyle/>
-          <a:p>
-            <a:pPr algn="l">
-              <a:spcAft>
-                <a:spcPts val="400"/>
-              </a:spcAft>
-            </a:pPr>
-            <a:r>
-              <a:rPr sz="2000" b="1">
-                <a:solidFill>
-                  <a:srgbClr val="1E2836"/>
-                </a:solidFill>
-                <a:latin typeface="Segoe UI"/>
-              </a:rPr>
-              <a:t>Любое число в презентации можно проверить по файлу и команде</a:t>
-            </a:r>
-          </a:p>
-        </p:txBody>
-      </p:sp>
-      <p:sp>
-        <p:nvSpPr>
-          <p:cNvPr id="10" name="TextBox 9"/>
-          <p:cNvSpPr txBox="1"/>
-          <p:nvPr/>
-        </p:nvSpPr>
-        <p:spPr>
-          <a:xfrm>
-            <a:off x="10607040" y="6355080"/>
-            <a:ext cx="1005840" cy="274320"/>
-          </a:xfrm>
-          <a:prstGeom prst="rect">
-            <a:avLst/>
-          </a:prstGeom>
-          <a:noFill/>
-        </p:spPr>
-        <p:txBody>
-          <a:bodyPr wrap="square" anchor="t" lIns="18288" rIns="18288" tIns="18288" bIns="18288">
-            <a:spAutoFit/>
-          </a:bodyPr>
-          <a:lstStyle/>
-          <a:p>
-            <a:pPr algn="r">
-              <a:spcAft>
-                <a:spcPts val="400"/>
-              </a:spcAft>
-            </a:pPr>
-            <a:r>
-              <a:rPr sz="1100" b="0">
-                <a:solidFill>
-                  <a:srgbClr val="9AA1AC"/>
-                </a:solidFill>
-                <a:latin typeface="Segoe UI"/>
-              </a:rPr>
-              <a:t>12 / 13</a:t>
-            </a:r>
-          </a:p>
-        </p:txBody>
-      </p:sp>
-    </p:spTree>
-  </p:cSld>
-  <p:clrMapOvr>
-    <a:masterClrMapping/>
-  </p:clrMapOvr>
-</p:sld>
-</file>
-
-<file path=ppt/slides/slide13.xml><?xml version="1.0" encoding="utf-8"?>
 <p:sld xmlns:a="http://schemas.openxmlformats.org/drawingml/2006/main" xmlns:p="http://schemas.openxmlformats.org/presentationml/2006/main" xmlns:r="http://schemas.openxmlformats.org/officeDocument/2006/relationships">
   <p:cSld>
     <p:bg>
@@ -6071,7 +5659,7 @@
                 </a:solidFill>
                 <a:latin typeface="Segoe UI"/>
               </a:rPr>
-              <a:t>02 / 13</a:t>
+              <a:t>02 / 12</a:t>
             </a:r>
           </a:p>
         </p:txBody>
@@ -6454,7 +6042,7 @@
                 </a:solidFill>
                 <a:latin typeface="Segoe UI"/>
               </a:rPr>
-              <a:t>03 / 13</a:t>
+              <a:t>03 / 12</a:t>
             </a:r>
           </a:p>
         </p:txBody>
@@ -6945,7 +6533,7 @@
                 </a:solidFill>
                 <a:latin typeface="Segoe UI"/>
               </a:rPr>
-              <a:t>04 / 13</a:t>
+              <a:t>04 / 12</a:t>
             </a:r>
           </a:p>
         </p:txBody>
@@ -7682,7 +7270,7 @@
                 </a:solidFill>
                 <a:latin typeface="Segoe UI"/>
               </a:rPr>
-              <a:t>05 / 13</a:t>
+              <a:t>05 / 12</a:t>
             </a:r>
           </a:p>
         </p:txBody>
@@ -7945,8 +7533,8 @@
         </p:nvSpPr>
         <p:spPr>
           <a:xfrm>
-            <a:off x="5120640" y="6035040"/>
-            <a:ext cx="6400800" cy="548640"/>
+            <a:off x="5120640" y="5897880"/>
+            <a:ext cx="5394960" cy="731520"/>
           </a:xfrm>
           <a:prstGeom prst="rect">
             <a:avLst/>
@@ -8042,7 +7630,7 @@
                 </a:solidFill>
                 <a:latin typeface="Segoe UI"/>
               </a:rPr>
-              <a:t>06 / 13</a:t>
+              <a:t>06 / 12</a:t>
             </a:r>
           </a:p>
         </p:txBody>
@@ -8305,8 +7893,8 @@
         </p:nvSpPr>
         <p:spPr>
           <a:xfrm>
-            <a:off x="5120640" y="6035040"/>
-            <a:ext cx="6400800" cy="548640"/>
+            <a:off x="5120640" y="5897880"/>
+            <a:ext cx="5394960" cy="731520"/>
           </a:xfrm>
           <a:prstGeom prst="rect">
             <a:avLst/>
@@ -8370,7 +7958,7 @@
                 </a:solidFill>
                 <a:latin typeface="Segoe UI"/>
               </a:rPr>
-              <a:t>07 / 13</a:t>
+              <a:t>07 / 12</a:t>
             </a:r>
           </a:p>
         </p:txBody>
@@ -8888,7 +8476,7 @@
                 </a:solidFill>
                 <a:latin typeface="Segoe UI"/>
               </a:rPr>
-              <a:t>08 / 13</a:t>
+              <a:t>08 / 12</a:t>
             </a:r>
           </a:p>
         </p:txBody>
@@ -9287,7 +8875,7 @@
                 </a:solidFill>
                 <a:latin typeface="Segoe UI"/>
               </a:rPr>
-              <a:t>09 / 13</a:t>
+              <a:t>09 / 12</a:t>
             </a:r>
           </a:p>
         </p:txBody>

--- a/presentation/deck_latest.pptx
+++ b/presentation/deck_latest.pptx
@@ -589,13 +589,13 @@
           <a:lstStyle/>
           <a:p>
             <a:r>
-              <a:t>На детальном фото модель считает предметы с ошибкой 0.59 шт. на кадр и определяет материал. Это фото с воды или дрона, где предмет виден целиком. На отложенных сессиях FML ошибка 0.59 предмета на кадр, у бейзлайна 2.86; на аэрофото Winans мы лучше открытого DebrisScan.</a:t>
+              <a:t>Эколог за пять шагов видит, что найдено, где, когда и насколько этому верить. Кнопка «Демо» проводит по шагам: район и даты, снимок с нумерованными зонами, карточка зоны, качество и статус, выгрузка. Первая строка карточки — что это: плавающий материал, пластик не подтверждён. Дальше статус, подтверждение независимой разметкой и прямо: количество предметов по этому снимку не определено; рядом — оценка по полю. Всё отфильтрованное выгружается в GeoJSON и CSV. Показываем это вживую в сервисе, кнопка «Демо», около полутора минут.</a:t>
             </a:r>
           </a:p>
           <a:p/>
           <a:p>
             <a:r>
-              <a:t>[3:40–4:00]</a:t>
+              <a:t>[3:28–5:34]</a:t>
             </a:r>
           </a:p>
         </p:txBody>
@@ -665,13 +665,13 @@
           <a:lstStyle/>
           <a:p>
             <a:r>
-              <a:t>Эколог за пять шагов видит, что найдено, где, когда и насколько этому верить. Кнопка «Демо» проводит по шагам: район и даты, снимок с нумерованными зонами, карточка зоны, качество и статус, выгрузка. Первая строка карточки — что это: плавающий материал, пластик не подтверждён. Дальше статус, подтверждение независимой разметкой и прямо: количество предметов по этому снимку не определено; рядом — оценка по полю. Всё отфильтрованное выгружается в GeoJSON и CSV. Показываем это вживую в сервисе, кнопка «Демо», около полутора минут.</a:t>
+              <a:t>Что ещё умеет карта: наша модель на новых снимках, дроны, дрейф и PRIME — у каждого слоя подписан источник. Это просьба жюри на чекпоинте. Реальное время — это наша модель на реальных снимках Sentinel-2: за 180 дней обработано моделью 202 из 1077 найденных снимков, с находками 10. NASA — только контекст. «Дроны» — детальные кадры с разметкой авторов, отдельно наш счётчик; карточка пишет «дрон, не спутник». «Дрейф» у находки: до 72 часов, течения и ветер на дату сцены, расчёт у 33 из 77. PRIME — демо-режим по просьбе жюри: как сервис выглядел бы на детальных снимках, не результат модели. На таймлайне у каждого источника своя дорожка.</a:t>
             </a:r>
           </a:p>
           <a:p/>
           <a:p>
             <a:r>
-              <a:t>[4:00–6:06]</a:t>
+              <a:t>[5:34–6:23]</a:t>
             </a:r>
           </a:p>
         </p:txBody>
@@ -747,7 +747,7 @@
           <a:p/>
           <a:p>
             <a:r>
-              <a:t>[6:06–6:17]</a:t>
+              <a:t>[6:23–6:34]</a:t>
             </a:r>
           </a:p>
         </p:txBody>
@@ -1349,13 +1349,13 @@
           <a:lstStyle/>
           <a:p>
             <a:r>
-              <a:t>Мы проверили связку снимок → штуки на всех найденных парах — посчитанные предметы спутнику не видны. Из 21 444 отрезков ADIS 66 совпали со снимком по месту и времени; в 6 с предметами детектор не сработал. На паре ISPRA посчитанные предметы лежат не рядом с пикселями детектора. Одиночные предметы спутнику не видны, а плотные нити никто не считал поштучно — поэтому штуки по снимку в сервисе только исследовательский сценарий.</a:t>
+              <a:t>На детальном фото модель считает предметы с ошибкой 0.59 шт. на кадр и определяет материал. Это фото с воды или дрона, где предмет виден целиком. На отложенных сессиях FML ошибка 0.59 предмета на кадр, у бейзлайна 2.86; на аэрофото Winans мы лучше открытого DebrisScan.</a:t>
             </a:r>
           </a:p>
           <a:p/>
           <a:p>
             <a:r>
-              <a:t>[3:08–3:40]</a:t>
+              <a:t>[3:08–3:28]</a:t>
             </a:r>
           </a:p>
         </p:txBody>
@@ -4570,7 +4570,7 @@
                 </a:solidFill>
                 <a:latin typeface="Segoe UI"/>
               </a:rPr>
-              <a:t>На детальном фото модель считает предметы с ошибкой 0.59 шт. на кадр и определяет материал</a:t>
+              <a:t>Эколог за пять шагов видит, что найдено, где, когда и насколько этому верить</a:t>
             </a:r>
           </a:p>
         </p:txBody>
@@ -4609,7 +4609,7 @@
                 </a:solidFill>
                 <a:latin typeface="Segoe UI"/>
               </a:rPr>
-              <a:t>0.59</a:t>
+              <a:t>4</a:t>
             </a:r>
           </a:p>
         </p:txBody>
@@ -4648,7 +4648,7 @@
                 </a:solidFill>
                 <a:latin typeface="Segoe UI"/>
               </a:rPr>
-              <a:t>шт./кадр — ошибка на FML (медиана-бейзлайн 2.86)</a:t>
+              <a:t>статуса зоны по постановке</a:t>
             </a:r>
           </a:p>
         </p:txBody>
@@ -4662,7 +4662,7 @@
         <p:spPr>
           <a:xfrm>
             <a:off x="649224" y="3520439"/>
-            <a:ext cx="4206240" cy="952500"/>
+            <a:ext cx="4206240" cy="571500"/>
           </a:xfrm>
           <a:prstGeom prst="rect">
             <a:avLst/>
@@ -4681,13 +4681,13 @@
               </a:spcAft>
             </a:pPr>
             <a:r>
-              <a:rPr sz="6000" b="1">
+              <a:rPr sz="3600" b="1">
                 <a:solidFill>
                   <a:srgbClr val="C1400B"/>
                 </a:solidFill>
                 <a:latin typeface="Segoe UI"/>
               </a:rPr>
-              <a:t>1.85</a:t>
+              <a:t>GeoJSON · CSV</a:t>
             </a:r>
           </a:p>
         </p:txBody>
@@ -4700,7 +4700,7 @@
         </p:nvSpPr>
         <p:spPr>
           <a:xfrm>
-            <a:off x="676656" y="4511040"/>
+            <a:off x="676656" y="4114800"/>
             <a:ext cx="4206240" cy="822960"/>
           </a:xfrm>
           <a:prstGeom prst="rect">
@@ -4726,14 +4726,14 @@
                 </a:solidFill>
                 <a:latin typeface="Segoe UI"/>
               </a:rPr>
-              <a:t>шт. на 164 м² кадра берега — Winans; DebrisScan 2.29</a:t>
+              <a:t>выгрузка того, что отфильтровано</a:t>
             </a:r>
           </a:p>
         </p:txBody>
       </p:sp>
       <p:pic>
         <p:nvPicPr>
-          <p:cNvPr id="7" name="Picture 6" descr="photo.jpg"/>
+          <p:cNvPr id="7" name="Picture 6" descr="card.jpg"/>
           <p:cNvPicPr>
             <a:picLocks noChangeAspect="1"/>
           </p:cNvPicPr>
@@ -4794,7 +4794,7 @@
                 </a:solidFill>
                 <a:latin typeface="Segoe UI"/>
               </a:rPr>
-              <a:t>FML: 1 190 кадров, разбиение по сессиям съёмки; AP50 0.914</a:t>
+              <a:t>«Демо ▶»: Район и даты → Снимок → Зона → Качество и статус → Выгрузка</a:t>
             </a:r>
           </a:p>
           <a:p>
@@ -4810,7 +4810,7 @@
                 </a:solidFill>
                 <a:latin typeface="Segoe UI"/>
               </a:rPr>
-              <a:t>Фото с воды или дрона, не спутник; шт./км² — только где известна площадь кадра</a:t>
+              <a:t>Карточка: «Что это» · статус · подтверждение · «Количество предметов по этому снимку не определено»</a:t>
             </a:r>
           </a:p>
         </p:txBody>
@@ -4908,13 +4908,13 @@
               </a:spcAft>
             </a:pPr>
             <a:r>
-              <a:rPr sz="2800" b="1">
+              <a:rPr sz="2500" b="1">
                 <a:solidFill>
                   <a:srgbClr val="1E2836"/>
                 </a:solidFill>
                 <a:latin typeface="Segoe UI"/>
               </a:rPr>
-              <a:t>Эколог за пять шагов видит, что найдено, где, когда и насколько этому верить</a:t>
+              <a:t>Что ещё умеет карта: наша модель на новых снимках, дроны, дрейф и PRIME — у каждого слоя подписан источник</a:t>
             </a:r>
           </a:p>
         </p:txBody>
@@ -4927,8 +4927,8 @@
         </p:nvSpPr>
         <p:spPr>
           <a:xfrm>
-            <a:off x="649224" y="1737360"/>
-            <a:ext cx="4206240" cy="952500"/>
+            <a:off x="649224" y="1627632"/>
+            <a:ext cx="2569464" cy="329184"/>
           </a:xfrm>
           <a:prstGeom prst="rect">
             <a:avLst/>
@@ -4947,13 +4947,13 @@
               </a:spcAft>
             </a:pPr>
             <a:r>
-              <a:rPr sz="6000" b="1">
+              <a:rPr sz="1700" b="1">
                 <a:solidFill>
                   <a:srgbClr val="C1400B"/>
                 </a:solidFill>
                 <a:latin typeface="Segoe UI"/>
               </a:rPr>
-              <a:t>4</a:t>
+              <a:t>Реальное время</a:t>
             </a:r>
           </a:p>
         </p:txBody>
@@ -4966,8 +4966,8 @@
         </p:nvSpPr>
         <p:spPr>
           <a:xfrm>
-            <a:off x="676656" y="2727960"/>
-            <a:ext cx="4206240" cy="822960"/>
+            <a:off x="649224" y="1956816"/>
+            <a:ext cx="2569464" cy="274320"/>
           </a:xfrm>
           <a:prstGeom prst="rect">
             <a:avLst/>
@@ -4986,98 +4986,20 @@
               </a:spcAft>
             </a:pPr>
             <a:r>
-              <a:rPr sz="1500" b="0">
+              <a:rPr sz="1100" b="1">
                 <a:solidFill>
                   <a:srgbClr val="4A5462"/>
                 </a:solidFill>
                 <a:latin typeface="Segoe UI"/>
               </a:rPr>
-              <a:t>статуса зоны по постановке</a:t>
-            </a:r>
-          </a:p>
-        </p:txBody>
-      </p:sp>
-      <p:sp>
-        <p:nvSpPr>
-          <p:cNvPr id="5" name="TextBox 4"/>
-          <p:cNvSpPr txBox="1"/>
-          <p:nvPr/>
-        </p:nvSpPr>
-        <p:spPr>
-          <a:xfrm>
-            <a:off x="649224" y="3520439"/>
-            <a:ext cx="4206240" cy="571500"/>
-          </a:xfrm>
-          <a:prstGeom prst="rect">
-            <a:avLst/>
-          </a:prstGeom>
-          <a:noFill/>
-        </p:spPr>
-        <p:txBody>
-          <a:bodyPr wrap="square" anchor="t" lIns="18288" rIns="18288" tIns="18288" bIns="18288">
-            <a:spAutoFit/>
-          </a:bodyPr>
-          <a:lstStyle/>
-          <a:p>
-            <a:pPr algn="l">
-              <a:spcAft>
-                <a:spcPts val="400"/>
-              </a:spcAft>
-            </a:pPr>
-            <a:r>
-              <a:rPr sz="3600" b="1">
-                <a:solidFill>
-                  <a:srgbClr val="C1400B"/>
-                </a:solidFill>
-                <a:latin typeface="Segoe UI"/>
-              </a:rPr>
-              <a:t>GeoJSON · CSV</a:t>
-            </a:r>
-          </a:p>
-        </p:txBody>
-      </p:sp>
-      <p:sp>
-        <p:nvSpPr>
-          <p:cNvPr id="6" name="TextBox 5"/>
-          <p:cNvSpPr txBox="1"/>
-          <p:nvPr/>
-        </p:nvSpPr>
-        <p:spPr>
-          <a:xfrm>
-            <a:off x="676656" y="4114800"/>
-            <a:ext cx="4206240" cy="822960"/>
-          </a:xfrm>
-          <a:prstGeom prst="rect">
-            <a:avLst/>
-          </a:prstGeom>
-          <a:noFill/>
-        </p:spPr>
-        <p:txBody>
-          <a:bodyPr wrap="square" anchor="t" lIns="18288" rIns="18288" tIns="18288" bIns="18288">
-            <a:spAutoFit/>
-          </a:bodyPr>
-          <a:lstStyle/>
-          <a:p>
-            <a:pPr algn="l">
-              <a:spcAft>
-                <a:spcPts val="400"/>
-              </a:spcAft>
-            </a:pPr>
-            <a:r>
-              <a:rPr sz="1500" b="0">
-                <a:solidFill>
-                  <a:srgbClr val="4A5462"/>
-                </a:solidFill>
-                <a:latin typeface="Segoe UI"/>
-              </a:rPr>
-              <a:t>выгрузка того, что отфильтровано</a:t>
+              <a:t>наша модель, автоматически</a:t>
             </a:r>
           </a:p>
         </p:txBody>
       </p:sp>
       <p:pic>
         <p:nvPicPr>
-          <p:cNvPr id="7" name="Picture 6" descr="card.jpg"/>
+          <p:cNvPr id="5" name="Picture 4" descr="s54_realtime.jpg"/>
           <p:cNvPicPr>
             <a:picLocks noChangeAspect="1"/>
           </p:cNvPicPr>
@@ -5091,8 +5013,8 @@
         </p:blipFill>
         <p:spPr>
           <a:xfrm>
-            <a:off x="5120640" y="2041133"/>
-            <a:ext cx="6400800" cy="3598692"/>
+            <a:off x="763524" y="2286000"/>
+            <a:ext cx="2340864" cy="1463040"/>
           </a:xfrm>
           <a:prstGeom prst="rect">
             <a:avLst/>
@@ -5106,14 +5028,14 @@
       </p:pic>
       <p:sp>
         <p:nvSpPr>
-          <p:cNvPr id="8" name="TextBox 7"/>
+          <p:cNvPr id="6" name="TextBox 5"/>
           <p:cNvSpPr txBox="1"/>
           <p:nvPr/>
         </p:nvSpPr>
         <p:spPr>
           <a:xfrm>
-            <a:off x="5120640" y="5897880"/>
-            <a:ext cx="5394960" cy="731520"/>
+            <a:off x="649224" y="3840480"/>
+            <a:ext cx="2569464" cy="1463039"/>
           </a:xfrm>
           <a:prstGeom prst="rect">
             <a:avLst/>
@@ -5128,40 +5050,544 @@
           <a:p>
             <a:pPr algn="l">
               <a:spcAft>
-                <a:spcPts val="200"/>
+                <a:spcPts val="300"/>
               </a:spcAft>
             </a:pPr>
             <a:r>
               <a:rPr sz="1200" b="0">
                 <a:solidFill>
+                  <a:srgbClr val="1E2836"/>
+                </a:solidFill>
+                <a:latin typeface="Segoe UI"/>
+              </a:rPr>
+              <a:t>За 180 дней обработано моделью 202 из 1077 найденных снимков, с находками 10. Те же фильтры; не проверено человеком. NASA 250–375 м — только контекст, модель на нём не запускаем.</a:t>
+            </a:r>
+          </a:p>
+        </p:txBody>
+      </p:sp>
+      <p:sp>
+        <p:nvSpPr>
+          <p:cNvPr id="7" name="TextBox 6"/>
+          <p:cNvSpPr txBox="1"/>
+          <p:nvPr/>
+        </p:nvSpPr>
+        <p:spPr>
+          <a:xfrm>
+            <a:off x="3419856" y="1627632"/>
+            <a:ext cx="2569464" cy="329184"/>
+          </a:xfrm>
+          <a:prstGeom prst="rect">
+            <a:avLst/>
+          </a:prstGeom>
+          <a:noFill/>
+        </p:spPr>
+        <p:txBody>
+          <a:bodyPr wrap="square" anchor="t" lIns="18288" rIns="18288" tIns="18288" bIns="18288">
+            <a:spAutoFit/>
+          </a:bodyPr>
+          <a:lstStyle/>
+          <a:p>
+            <a:pPr algn="l">
+              <a:spcAft>
+                <a:spcPts val="400"/>
+              </a:spcAft>
+            </a:pPr>
+            <a:r>
+              <a:rPr sz="1700" b="1">
+                <a:solidFill>
+                  <a:srgbClr val="C1400B"/>
+                </a:solidFill>
+                <a:latin typeface="Segoe UI"/>
+              </a:rPr>
+              <a:t>Дроны</a:t>
+            </a:r>
+          </a:p>
+        </p:txBody>
+      </p:sp>
+      <p:sp>
+        <p:nvSpPr>
+          <p:cNvPr id="8" name="TextBox 7"/>
+          <p:cNvSpPr txBox="1"/>
+          <p:nvPr/>
+        </p:nvSpPr>
+        <p:spPr>
+          <a:xfrm>
+            <a:off x="3419856" y="1956816"/>
+            <a:ext cx="2569464" cy="274320"/>
+          </a:xfrm>
+          <a:prstGeom prst="rect">
+            <a:avLst/>
+          </a:prstGeom>
+          <a:noFill/>
+        </p:spPr>
+        <p:txBody>
+          <a:bodyPr wrap="square" anchor="t" lIns="18288" rIns="18288" tIns="18288" bIns="18288">
+            <a:spAutoFit/>
+          </a:bodyPr>
+          <a:lstStyle/>
+          <a:p>
+            <a:pPr algn="l">
+              <a:spcAft>
+                <a:spcPts val="400"/>
+              </a:spcAft>
+            </a:pPr>
+            <a:r>
+              <a:rPr sz="1100" b="1">
+                <a:solidFill>
                   <a:srgbClr val="4A5462"/>
                 </a:solidFill>
                 <a:latin typeface="Segoe UI"/>
               </a:rPr>
-              <a:t>«Демо ▶»: Район и даты → Снимок → Зона → Качество и статус → Выгрузка</a:t>
-            </a:r>
-          </a:p>
+              <a:t>дрон, не спутник</a:t>
+            </a:r>
+          </a:p>
+        </p:txBody>
+      </p:sp>
+      <p:pic>
+        <p:nvPicPr>
+          <p:cNvPr id="9" name="Picture 8" descr="s54_drones.jpg"/>
+          <p:cNvPicPr>
+            <a:picLocks noChangeAspect="1"/>
+          </p:cNvPicPr>
+          <p:nvPr/>
+        </p:nvPicPr>
+        <p:blipFill>
+          <a:blip r:embed="rId3"/>
+          <a:stretch>
+            <a:fillRect/>
+          </a:stretch>
+        </p:blipFill>
+        <p:spPr>
+          <a:xfrm>
+            <a:off x="3534156" y="2286000"/>
+            <a:ext cx="2340864" cy="1463040"/>
+          </a:xfrm>
+          <a:prstGeom prst="rect">
+            <a:avLst/>
+          </a:prstGeom>
+          <a:ln w="9525">
+            <a:solidFill>
+              <a:srgbClr val="DDDFE3"/>
+            </a:solidFill>
+          </a:ln>
+        </p:spPr>
+      </p:pic>
+      <p:sp>
+        <p:nvSpPr>
+          <p:cNvPr id="10" name="TextBox 9"/>
+          <p:cNvSpPr txBox="1"/>
+          <p:nvPr/>
+        </p:nvSpPr>
+        <p:spPr>
+          <a:xfrm>
+            <a:off x="3419856" y="3840480"/>
+            <a:ext cx="2569464" cy="1463039"/>
+          </a:xfrm>
+          <a:prstGeom prst="rect">
+            <a:avLst/>
+          </a:prstGeom>
+          <a:noFill/>
+        </p:spPr>
+        <p:txBody>
+          <a:bodyPr wrap="square" anchor="t" lIns="18288" rIns="18288" tIns="18288" bIns="18288">
+            <a:spAutoFit/>
+          </a:bodyPr>
+          <a:lstStyle/>
           <a:p>
             <a:pPr algn="l">
               <a:spcAft>
-                <a:spcPts val="200"/>
+                <a:spcPts val="300"/>
               </a:spcAft>
             </a:pPr>
             <a:r>
               <a:rPr sz="1200" b="0">
                 <a:solidFill>
+                  <a:srgbClr val="1E2836"/>
+                </a:solidFill>
+                <a:latin typeface="Segoe UI"/>
+              </a:rPr>
+              <a:t>Детальные кадры открытых наборов — 6 наборов, 81 кадр (4 — дрон, остальные — самолёт и судно): рамки и классы авторов. Шт./м² — только при известной площади кадра. Наш счётчик: 274 из 444 размеченных, ложных 257 — вне обучения ошибается.</a:t>
+            </a:r>
+          </a:p>
+        </p:txBody>
+      </p:sp>
+      <p:sp>
+        <p:nvSpPr>
+          <p:cNvPr id="11" name="TextBox 10"/>
+          <p:cNvSpPr txBox="1"/>
+          <p:nvPr/>
+        </p:nvSpPr>
+        <p:spPr>
+          <a:xfrm>
+            <a:off x="6190488" y="1627632"/>
+            <a:ext cx="2569464" cy="329184"/>
+          </a:xfrm>
+          <a:prstGeom prst="rect">
+            <a:avLst/>
+          </a:prstGeom>
+          <a:noFill/>
+        </p:spPr>
+        <p:txBody>
+          <a:bodyPr wrap="square" anchor="t" lIns="18288" rIns="18288" tIns="18288" bIns="18288">
+            <a:spAutoFit/>
+          </a:bodyPr>
+          <a:lstStyle/>
+          <a:p>
+            <a:pPr algn="l">
+              <a:spcAft>
+                <a:spcPts val="400"/>
+              </a:spcAft>
+            </a:pPr>
+            <a:r>
+              <a:rPr sz="1700" b="1">
+                <a:solidFill>
+                  <a:srgbClr val="C1400B"/>
+                </a:solidFill>
+                <a:latin typeface="Segoe UI"/>
+              </a:rPr>
+              <a:t>Дрейф ▶</a:t>
+            </a:r>
+          </a:p>
+        </p:txBody>
+      </p:sp>
+      <p:sp>
+        <p:nvSpPr>
+          <p:cNvPr id="12" name="TextBox 11"/>
+          <p:cNvSpPr txBox="1"/>
+          <p:nvPr/>
+        </p:nvSpPr>
+        <p:spPr>
+          <a:xfrm>
+            <a:off x="6190488" y="1956816"/>
+            <a:ext cx="2569464" cy="274320"/>
+          </a:xfrm>
+          <a:prstGeom prst="rect">
+            <a:avLst/>
+          </a:prstGeom>
+          <a:noFill/>
+        </p:spPr>
+        <p:txBody>
+          <a:bodyPr wrap="square" anchor="t" lIns="18288" rIns="18288" tIns="18288" bIns="18288">
+            <a:spAutoFit/>
+          </a:bodyPr>
+          <a:lstStyle/>
+          <a:p>
+            <a:pPr algn="l">
+              <a:spcAft>
+                <a:spcPts val="400"/>
+              </a:spcAft>
+            </a:pPr>
+            <a:r>
+              <a:rPr sz="1100" b="1">
+                <a:solidFill>
                   <a:srgbClr val="4A5462"/>
                 </a:solidFill>
                 <a:latin typeface="Segoe UI"/>
               </a:rPr>
-              <a:t>Карточка: «Что это» · статус · подтверждение · «Количество предметов по этому снимку не определено»</a:t>
-            </a:r>
-          </a:p>
-        </p:txBody>
-      </p:sp>
-      <p:sp>
-        <p:nvSpPr>
-          <p:cNvPr id="9" name="TextBox 8"/>
+              <a:t>HYCOM + GFS на дату сцены</a:t>
+            </a:r>
+          </a:p>
+        </p:txBody>
+      </p:sp>
+      <p:pic>
+        <p:nvPicPr>
+          <p:cNvPr id="13" name="Picture 12" descr="s54_drift_map.jpg"/>
+          <p:cNvPicPr>
+            <a:picLocks noChangeAspect="1"/>
+          </p:cNvPicPr>
+          <p:nvPr/>
+        </p:nvPicPr>
+        <p:blipFill>
+          <a:blip r:embed="rId4"/>
+          <a:stretch>
+            <a:fillRect/>
+          </a:stretch>
+        </p:blipFill>
+        <p:spPr>
+          <a:xfrm>
+            <a:off x="6304788" y="2286000"/>
+            <a:ext cx="2340864" cy="1463040"/>
+          </a:xfrm>
+          <a:prstGeom prst="rect">
+            <a:avLst/>
+          </a:prstGeom>
+          <a:ln w="9525">
+            <a:solidFill>
+              <a:srgbClr val="DDDFE3"/>
+            </a:solidFill>
+          </a:ln>
+        </p:spPr>
+      </p:pic>
+      <p:sp>
+        <p:nvSpPr>
+          <p:cNvPr id="14" name="TextBox 13"/>
+          <p:cNvSpPr txBox="1"/>
+          <p:nvPr/>
+        </p:nvSpPr>
+        <p:spPr>
+          <a:xfrm>
+            <a:off x="6190488" y="3840480"/>
+            <a:ext cx="2569464" cy="1463039"/>
+          </a:xfrm>
+          <a:prstGeom prst="rect">
+            <a:avLst/>
+          </a:prstGeom>
+          <a:noFill/>
+        </p:spPr>
+        <p:txBody>
+          <a:bodyPr wrap="square" anchor="t" lIns="18288" rIns="18288" tIns="18288" bIns="18288">
+            <a:spAutoFit/>
+          </a:bodyPr>
+          <a:lstStyle/>
+          <a:p>
+            <a:pPr algn="l">
+              <a:spcAft>
+                <a:spcPts val="300"/>
+              </a:spcAft>
+            </a:pPr>
+            <a:r>
+              <a:rPr sz="1200" b="0">
+                <a:solidFill>
+                  <a:srgbClr val="1E2836"/>
+                </a:solidFill>
+                <a:latin typeface="Segoe UI"/>
+              </a:rPr>
+              <a:t>Кнопка у находки на карте: до 72 ч, облако частиц с вероятностью. Расчёт есть у 33 из 77 находок, у остальных — «нет расчёта» с причиной. Прогноз модели, не наблюдение.</a:t>
+            </a:r>
+          </a:p>
+        </p:txBody>
+      </p:sp>
+      <p:sp>
+        <p:nvSpPr>
+          <p:cNvPr id="15" name="TextBox 14"/>
+          <p:cNvSpPr txBox="1"/>
+          <p:nvPr/>
+        </p:nvSpPr>
+        <p:spPr>
+          <a:xfrm>
+            <a:off x="8961120" y="1627632"/>
+            <a:ext cx="2569464" cy="329184"/>
+          </a:xfrm>
+          <a:prstGeom prst="rect">
+            <a:avLst/>
+          </a:prstGeom>
+          <a:noFill/>
+        </p:spPr>
+        <p:txBody>
+          <a:bodyPr wrap="square" anchor="t" lIns="18288" rIns="18288" tIns="18288" bIns="18288">
+            <a:spAutoFit/>
+          </a:bodyPr>
+          <a:lstStyle/>
+          <a:p>
+            <a:pPr algn="l">
+              <a:spcAft>
+                <a:spcPts val="400"/>
+              </a:spcAft>
+            </a:pPr>
+            <a:r>
+              <a:rPr sz="1700" b="1">
+                <a:solidFill>
+                  <a:srgbClr val="C1400B"/>
+                </a:solidFill>
+                <a:latin typeface="Segoe UI"/>
+              </a:rPr>
+              <a:t>PRIME MODE</a:t>
+            </a:r>
+          </a:p>
+        </p:txBody>
+      </p:sp>
+      <p:sp>
+        <p:nvSpPr>
+          <p:cNvPr id="16" name="TextBox 15"/>
+          <p:cNvSpPr txBox="1"/>
+          <p:nvPr/>
+        </p:nvSpPr>
+        <p:spPr>
+          <a:xfrm>
+            <a:off x="8961120" y="1956816"/>
+            <a:ext cx="2569464" cy="274320"/>
+          </a:xfrm>
+          <a:prstGeom prst="rect">
+            <a:avLst/>
+          </a:prstGeom>
+          <a:noFill/>
+        </p:spPr>
+        <p:txBody>
+          <a:bodyPr wrap="square" anchor="t" lIns="18288" rIns="18288" tIns="18288" bIns="18288">
+            <a:spAutoFit/>
+          </a:bodyPr>
+          <a:lstStyle/>
+          <a:p>
+            <a:pPr algn="l">
+              <a:spcAft>
+                <a:spcPts val="400"/>
+              </a:spcAft>
+            </a:pPr>
+            <a:r>
+              <a:rPr sz="1100" b="1">
+                <a:solidFill>
+                  <a:srgbClr val="4A5462"/>
+                </a:solidFill>
+                <a:latin typeface="Segoe UI"/>
+              </a:rPr>
+              <a:t>демо-данные, не результат модели</a:t>
+            </a:r>
+          </a:p>
+        </p:txBody>
+      </p:sp>
+      <p:pic>
+        <p:nvPicPr>
+          <p:cNvPr id="17" name="Picture 16" descr="s54_prime.jpg"/>
+          <p:cNvPicPr>
+            <a:picLocks noChangeAspect="1"/>
+          </p:cNvPicPr>
+          <p:nvPr/>
+        </p:nvPicPr>
+        <p:blipFill>
+          <a:blip r:embed="rId5"/>
+          <a:stretch>
+            <a:fillRect/>
+          </a:stretch>
+        </p:blipFill>
+        <p:spPr>
+          <a:xfrm>
+            <a:off x="9075420" y="2286000"/>
+            <a:ext cx="2340864" cy="1463040"/>
+          </a:xfrm>
+          <a:prstGeom prst="rect">
+            <a:avLst/>
+          </a:prstGeom>
+          <a:ln w="9525">
+            <a:solidFill>
+              <a:srgbClr val="DDDFE3"/>
+            </a:solidFill>
+          </a:ln>
+        </p:spPr>
+      </p:pic>
+      <p:sp>
+        <p:nvSpPr>
+          <p:cNvPr id="18" name="TextBox 17"/>
+          <p:cNvSpPr txBox="1"/>
+          <p:nvPr/>
+        </p:nvSpPr>
+        <p:spPr>
+          <a:xfrm>
+            <a:off x="8961120" y="3840480"/>
+            <a:ext cx="2569464" cy="1463039"/>
+          </a:xfrm>
+          <a:prstGeom prst="rect">
+            <a:avLst/>
+          </a:prstGeom>
+          <a:noFill/>
+        </p:spPr>
+        <p:txBody>
+          <a:bodyPr wrap="square" anchor="t" lIns="18288" rIns="18288" tIns="18288" bIns="18288">
+            <a:spAutoFit/>
+          </a:bodyPr>
+          <a:lstStyle/>
+          <a:p>
+            <a:pPr algn="l">
+              <a:spcAft>
+                <a:spcPts val="300"/>
+              </a:spcAft>
+            </a:pPr>
+            <a:r>
+              <a:rPr sz="1200" b="0">
+                <a:solidFill>
+                  <a:srgbClr val="1E2836"/>
+                </a:solidFill>
+                <a:latin typeface="Segoe UI"/>
+              </a:rPr>
+              <a:t>Как сервис будет выглядеть на детальных снимках — по просьбе жюри. В точках событий CSV организаторов — демо-снимки из реальной воды и вырезок предметов с дронов, числа из строк CSV. Выключен — ни одного демо-объекта.</a:t>
+            </a:r>
+          </a:p>
+        </p:txBody>
+      </p:sp>
+      <p:sp>
+        <p:nvSpPr>
+          <p:cNvPr id="19" name="Rectangle 18"/>
+          <p:cNvSpPr/>
+          <p:nvPr/>
+        </p:nvSpPr>
+        <p:spPr>
+          <a:xfrm>
+            <a:off x="649224" y="5422392"/>
+            <a:ext cx="10881360" cy="19050"/>
+          </a:xfrm>
+          <a:prstGeom prst="rect">
+            <a:avLst/>
+          </a:prstGeom>
+          <a:solidFill>
+            <a:srgbClr val="A7ADB7"/>
+          </a:solidFill>
+          <a:ln>
+            <a:noFill/>
+          </a:ln>
+        </p:spPr>
+        <p:style>
+          <a:lnRef idx="1">
+            <a:schemeClr val="accent1"/>
+          </a:lnRef>
+          <a:fillRef idx="3">
+            <a:schemeClr val="accent1"/>
+          </a:fillRef>
+          <a:effectRef idx="2">
+            <a:schemeClr val="accent1"/>
+          </a:effectRef>
+          <a:fontRef idx="minor">
+            <a:schemeClr val="lt1"/>
+          </a:fontRef>
+        </p:style>
+        <p:txBody>
+          <a:bodyPr rtlCol="0" anchor="ctr"/>
+          <a:lstStyle/>
+          <a:p>
+            <a:pPr algn="ctr"/>
+          </a:p>
+        </p:txBody>
+      </p:sp>
+      <p:sp>
+        <p:nvSpPr>
+          <p:cNvPr id="20" name="TextBox 19"/>
+          <p:cNvSpPr txBox="1"/>
+          <p:nvPr/>
+        </p:nvSpPr>
+        <p:spPr>
+          <a:xfrm>
+            <a:off x="649224" y="5532120"/>
+            <a:ext cx="10881360" cy="548640"/>
+          </a:xfrm>
+          <a:prstGeom prst="rect">
+            <a:avLst/>
+          </a:prstGeom>
+          <a:noFill/>
+        </p:spPr>
+        <p:txBody>
+          <a:bodyPr wrap="square" anchor="t" lIns="18288" rIns="18288" tIns="18288" bIns="18288">
+            <a:spAutoFit/>
+          </a:bodyPr>
+          <a:lstStyle/>
+          <a:p>
+            <a:pPr algn="l">
+              <a:spcAft>
+                <a:spcPts val="400"/>
+              </a:spcAft>
+            </a:pPr>
+            <a:r>
+              <a:rPr sz="1800" b="1">
+                <a:solidFill>
+                  <a:srgbClr val="1E2836"/>
+                </a:solidFill>
+                <a:latin typeface="Segoe UI"/>
+              </a:rPr>
+              <a:t>Обзор ≠ обнаружение · дрон ≠ спутник · демо ≠ результат модели</a:t>
+            </a:r>
+          </a:p>
+        </p:txBody>
+      </p:sp>
+      <p:sp>
+        <p:nvSpPr>
+          <p:cNvPr id="21" name="TextBox 20"/>
           <p:cNvSpPr txBox="1"/>
           <p:nvPr/>
         </p:nvSpPr>
@@ -8541,7 +8967,7 @@
                 </a:solidFill>
                 <a:latin typeface="Segoe UI"/>
               </a:rPr>
-              <a:t>Мы проверили связку снимок → штуки на всех найденных парах — посчитанные предметы спутнику не видны</a:t>
+              <a:t>На детальном фото модель считает предметы с ошибкой 0.59 шт. на кадр и определяет материал</a:t>
             </a:r>
           </a:p>
         </p:txBody>
@@ -8580,7 +9006,7 @@
                 </a:solidFill>
                 <a:latin typeface="Segoe UI"/>
               </a:rPr>
-              <a:t>66</a:t>
+              <a:t>0.59</a:t>
             </a:r>
           </a:p>
         </p:txBody>
@@ -8619,7 +9045,7 @@
                 </a:solidFill>
                 <a:latin typeface="Segoe UI"/>
               </a:rPr>
-              <a:t>пар ADIS по месту и времени</a:t>
+              <a:t>шт./кадр — ошибка на FML (медиана-бейзлайн 2.86)</a:t>
             </a:r>
           </a:p>
         </p:txBody>
@@ -8658,7 +9084,7 @@
                 </a:solidFill>
                 <a:latin typeface="Segoe UI"/>
               </a:rPr>
-              <a:t>0</a:t>
+              <a:t>1.85</a:t>
             </a:r>
           </a:p>
         </p:txBody>
@@ -8697,14 +9123,14 @@
                 </a:solidFill>
                 <a:latin typeface="Segoe UI"/>
               </a:rPr>
-              <a:t>пар с видимым сигналом на снимке</a:t>
+              <a:t>шт. на 164 м² кадра берега — Winans; DebrisScan 2.29</a:t>
             </a:r>
           </a:p>
         </p:txBody>
       </p:sp>
       <p:pic>
         <p:nvPicPr>
-          <p:cNvPr id="7" name="Picture 6" descr="ispra_er604_20190916.png"/>
+          <p:cNvPr id="7" name="Picture 6" descr="photo.jpg"/>
           <p:cNvPicPr>
             <a:picLocks noChangeAspect="1"/>
           </p:cNvPicPr>
@@ -8718,8 +9144,8 @@
         </p:blipFill>
         <p:spPr>
           <a:xfrm>
-            <a:off x="5120640" y="1951061"/>
-            <a:ext cx="6400799" cy="3184477"/>
+            <a:off x="5120640" y="2041133"/>
+            <a:ext cx="6400800" cy="3598692"/>
           </a:xfrm>
           <a:prstGeom prst="rect">
             <a:avLst/>
@@ -8739,8 +9165,8 @@
         </p:nvSpPr>
         <p:spPr>
           <a:xfrm>
-            <a:off x="5120640" y="5440680"/>
-            <a:ext cx="6400800" cy="822960"/>
+            <a:off x="5120640" y="5897880"/>
+            <a:ext cx="5394960" cy="731520"/>
           </a:xfrm>
           <a:prstGeom prst="rect">
             <a:avLst/>
@@ -8765,7 +9191,7 @@
                 </a:solidFill>
                 <a:latin typeface="Segoe UI"/>
               </a:rPr>
-              <a:t>ADIS: 21 444 отрезков → 66 пар; в 6 с предметами детектор сработал в 0</a:t>
+              <a:t>FML: 1 190 кадров, разбиение по сессиям съёмки; AP50 0.914</a:t>
             </a:r>
           </a:p>
           <a:p>
@@ -8781,23 +9207,7 @@
                 </a:solidFill>
                 <a:latin typeface="Segoe UI"/>
               </a:rPr>
-              <a:t>ISPRA: 167 трансект обработаны одним скриптом; на ER604 ни один предмет не ближе к пикселю детектора</a:t>
-            </a:r>
-          </a:p>
-          <a:p>
-            <a:pPr algn="l">
-              <a:spcAft>
-                <a:spcPts val="200"/>
-              </a:spcAft>
-            </a:pPr>
-            <a:r>
-              <a:rPr sz="1200" b="0">
-                <a:solidFill>
-                  <a:srgbClr val="4A5462"/>
-                </a:solidFill>
-                <a:latin typeface="Segoe UI"/>
-              </a:rPr>
-              <a:t>Искусственные мишени: 19 дат со счётом — детектор видит пиксель только при большом покрытии</a:t>
+              <a:t>Фото с воды или дрона, не спутник; шт./км² — только где известна площадь кадра</a:t>
             </a:r>
           </a:p>
         </p:txBody>
@@ -8805,45 +9215,6 @@
       <p:sp>
         <p:nvSpPr>
           <p:cNvPr id="9" name="TextBox 8"/>
-          <p:cNvSpPr txBox="1"/>
-          <p:nvPr/>
-        </p:nvSpPr>
-        <p:spPr>
-          <a:xfrm>
-            <a:off x="649224" y="5349240"/>
-            <a:ext cx="4297680" cy="914400"/>
-          </a:xfrm>
-          <a:prstGeom prst="rect">
-            <a:avLst/>
-          </a:prstGeom>
-          <a:noFill/>
-        </p:spPr>
-        <p:txBody>
-          <a:bodyPr wrap="square" anchor="t" lIns="18288" rIns="18288" tIns="18288" bIns="18288">
-            <a:spAutoFit/>
-          </a:bodyPr>
-          <a:lstStyle/>
-          <a:p>
-            <a:pPr algn="l">
-              <a:spcAft>
-                <a:spcPts val="400"/>
-              </a:spcAft>
-            </a:pPr>
-            <a:r>
-              <a:rPr sz="1500" b="1">
-                <a:solidFill>
-                  <a:srgbClr val="1E2836"/>
-                </a:solidFill>
-                <a:latin typeface="Segoe UI"/>
-              </a:rPr>
-              <a:t>Число штук по снимку — только исследовательский сценарий, не измерение</a:t>
-            </a:r>
-          </a:p>
-        </p:txBody>
-      </p:sp>
-      <p:sp>
-        <p:nvSpPr>
-          <p:cNvPr id="10" name="TextBox 9"/>
           <p:cNvSpPr txBox="1"/>
           <p:nvPr/>
         </p:nvSpPr>
